--- a/PFE/PFE_Cosmetique_Presentation.pptx
+++ b/PFE/PFE_Cosmetique_Presentation.pptx
@@ -4,6 +4,9 @@
   <p:sldMasterIdLst>
     <p:sldMasterId id="2147483648" r:id="rId1"/>
   </p:sldMasterIdLst>
+  <p:notesMasterIdLst>
+    <p:notesMasterId r:id="rId13"/>
+  </p:notesMasterIdLst>
   <p:sldIdLst>
     <p:sldId id="256" r:id="rId2"/>
     <p:sldId id="257" r:id="rId3"/>
@@ -17,10 +20,7 @@
     <p:sldId id="265" r:id="rId11"/>
     <p:sldId id="266" r:id="rId12"/>
   </p:sldIdLst>
-  <p:notesMasterIdLst>
-    <p:notesMasterId r:id="rId13"/>
-  </p:notesMasterIdLst>
-  <p:sldSz cx="9144000" cy="5143500"/>
+  <p:sldSz cx="9144000" cy="5143500" type="screen16x9"/>
   <p:notesSz cx="5143500" cy="9144000"/>
   <p:defaultTextStyle>
     <a:lvl1pPr marL="0" algn="l" defTabSz="914400" rtl="0" eaLnBrk="1" latinLnBrk="0" hangingPunct="1">
@@ -114,6 +114,11 @@
       </a:defRPr>
     </a:lvl9pPr>
   </p:defaultTextStyle>
+  <p:extLst>
+    <p:ext uri="{EFAFB233-063F-42B5-8137-9DF3F51BA10A}">
+      <p15:sldGuideLst xmlns:p15="http://schemas.microsoft.com/office/powerpoint/2012/main"/>
+    </p:ext>
+  </p:extLst>
 </p:presentation>
 </file>
 
@@ -139,234 +144,10 @@
           <a:chExt cx="0" cy="0"/>
         </a:xfrm>
       </p:grpSpPr>
-      <p:sp>
-        <p:nvSpPr>
-          <p:cNvPr id="2" name="Header Placeholder 1"/>
-          <p:cNvSpPr>
-            <a:spLocks noGrp="1"/>
-          </p:cNvSpPr>
-          <p:nvPr>
-            <p:ph type="hdr" sz="quarter"/>
-          </p:nvPr>
-        </p:nvSpPr>
-        <p:spPr>
-          <a:xfrm>
-            <a:off x="0" y="0"/>
-            <a:ext cx="2971800" cy="458788"/>
-          </a:xfrm>
-          <a:prstGeom prst="rect">
-            <a:avLst/>
-          </a:prstGeom>
-        </p:spPr>
-        <p:txBody>
-          <a:bodyPr vert="horz" lIns="91440" tIns="45720" rIns="91440" bIns="45720" rtlCol="0"/>
-          <a:lstStyle>
-            <a:lvl1pPr algn="l">
-              <a:defRPr sz="1200"/>
-            </a:lvl1pPr>
-          </a:lstStyle>
-          <a:p>
-            <a:endParaRPr lang="en-US"/>
-          </a:p>
-        </p:txBody>
-      </p:sp>
-      <p:sp>
-        <p:nvSpPr>
-          <p:cNvPr id="3" name="Date Placeholder 2"/>
-          <p:cNvSpPr>
-            <a:spLocks noGrp="1"/>
-          </p:cNvSpPr>
-          <p:nvPr>
-            <p:ph type="dt" idx="1"/>
-          </p:nvPr>
-        </p:nvSpPr>
-        <p:spPr>
-          <a:xfrm>
-            <a:off x="3884613" y="0"/>
-            <a:ext cx="2971800" cy="458788"/>
-          </a:xfrm>
-          <a:prstGeom prst="rect">
-            <a:avLst/>
-          </a:prstGeom>
-        </p:spPr>
-        <p:txBody>
-          <a:bodyPr vert="horz" lIns="91440" tIns="45720" rIns="91440" bIns="45720" rtlCol="0"/>
-          <a:lstStyle>
-            <a:lvl1pPr algn="r">
-              <a:defRPr sz="1200"/>
-            </a:lvl1pPr>
-          </a:lstStyle>
-          <a:p>
-            <a:fld id="{5282F153-3F37-0F45-9E97-73ACFA13230C}" type="datetimeFigureOut">
-              <a:rPr lang="en-US"/>
-              <a:t>7/23/19</a:t>
-            </a:fld>
-            <a:endParaRPr lang="en-US"/>
-          </a:p>
-        </p:txBody>
-      </p:sp>
-      <p:sp>
-        <p:nvSpPr>
-          <p:cNvPr id="4" name="Slide Image Placeholder 3"/>
-          <p:cNvSpPr>
-            <a:spLocks noGrp="1" noRot="1" noChangeAspect="1"/>
-          </p:cNvSpPr>
-          <p:nvPr>
-            <p:ph type="sldImg" idx="2"/>
-          </p:nvPr>
-        </p:nvSpPr>
-        <p:spPr>
-          <a:xfrm>
-            <a:off x="685800" y="1143000"/>
-            <a:ext cx="5486400" cy="3086100"/>
-          </a:xfrm>
-          <a:prstGeom prst="rect">
-            <a:avLst/>
-          </a:prstGeom>
-          <a:noFill/>
-          <a:ln w="12700">
-            <a:solidFill>
-              <a:prstClr val="black"/>
-            </a:solidFill>
-          </a:ln>
-        </p:spPr>
-        <p:txBody>
-          <a:bodyPr vert="horz" lIns="91440" tIns="45720" rIns="91440" bIns="45720" rtlCol="0" anchor="ctr"/>
-          <a:lstStyle/>
-          <a:p>
-            <a:endParaRPr lang="en-US"/>
-          </a:p>
-        </p:txBody>
-      </p:sp>
-      <p:sp>
-        <p:nvSpPr>
-          <p:cNvPr id="5" name="Notes Placeholder 4"/>
-          <p:cNvSpPr>
-            <a:spLocks noGrp="1"/>
-          </p:cNvSpPr>
-          <p:nvPr>
-            <p:ph type="body" sz="quarter" idx="3"/>
-          </p:nvPr>
-        </p:nvSpPr>
-        <p:spPr>
-          <a:xfrm>
-            <a:off x="685800" y="4400550"/>
-            <a:ext cx="5486400" cy="3600450"/>
-          </a:xfrm>
-          <a:prstGeom prst="rect">
-            <a:avLst/>
-          </a:prstGeom>
-        </p:spPr>
-        <p:txBody>
-          <a:bodyPr vert="horz" lIns="91440" tIns="45720" rIns="91440" bIns="45720" rtlCol="0"/>
-          <a:lstStyle/>
-          <a:p>
-            <a:pPr lvl="0"/>
-            <a:r>
-              <a:rPr lang="en-US"/>
-              <a:t>Click to edit Master text styles</a:t>
-            </a:r>
-          </a:p>
-          <a:p>
-            <a:pPr lvl="1"/>
-            <a:r>
-              <a:rPr lang="en-US"/>
-              <a:t>Second level</a:t>
-            </a:r>
-          </a:p>
-          <a:p>
-            <a:pPr lvl="2"/>
-            <a:r>
-              <a:rPr lang="en-US"/>
-              <a:t>Third level</a:t>
-            </a:r>
-          </a:p>
-          <a:p>
-            <a:pPr lvl="3"/>
-            <a:r>
-              <a:rPr lang="en-US"/>
-              <a:t>Fourth level</a:t>
-            </a:r>
-          </a:p>
-          <a:p>
-            <a:pPr lvl="4"/>
-            <a:r>
-              <a:rPr lang="en-US"/>
-              <a:t>Fifth level</a:t>
-            </a:r>
-          </a:p>
-        </p:txBody>
-      </p:sp>
-      <p:sp>
-        <p:nvSpPr>
-          <p:cNvPr id="6" name="Footer Placeholder 5"/>
-          <p:cNvSpPr>
-            <a:spLocks noGrp="1"/>
-          </p:cNvSpPr>
-          <p:nvPr>
-            <p:ph type="ftr" sz="quarter" idx="4"/>
-          </p:nvPr>
-        </p:nvSpPr>
-        <p:spPr>
-          <a:xfrm>
-            <a:off x="0" y="8685213"/>
-            <a:ext cx="2971800" cy="458787"/>
-          </a:xfrm>
-          <a:prstGeom prst="rect">
-            <a:avLst/>
-          </a:prstGeom>
-        </p:spPr>
-        <p:txBody>
-          <a:bodyPr vert="horz" lIns="91440" tIns="45720" rIns="91440" bIns="45720" rtlCol="0" anchor="b"/>
-          <a:lstStyle>
-            <a:lvl1pPr algn="l">
-              <a:defRPr sz="1200"/>
-            </a:lvl1pPr>
-          </a:lstStyle>
-          <a:p>
-            <a:endParaRPr lang="en-US"/>
-          </a:p>
-        </p:txBody>
-      </p:sp>
-      <p:sp>
-        <p:nvSpPr>
-          <p:cNvPr id="7" name="Slide Number Placeholder 6"/>
-          <p:cNvSpPr>
-            <a:spLocks noGrp="1"/>
-          </p:cNvSpPr>
-          <p:nvPr>
-            <p:ph type="sldNum" sz="quarter" idx="5"/>
-          </p:nvPr>
-        </p:nvSpPr>
-        <p:spPr>
-          <a:xfrm>
-            <a:off x="3884613" y="8685213"/>
-            <a:ext cx="2971800" cy="458787"/>
-          </a:xfrm>
-          <a:prstGeom prst="rect">
-            <a:avLst/>
-          </a:prstGeom>
-        </p:spPr>
-        <p:txBody>
-          <a:bodyPr vert="horz" lIns="91440" tIns="45720" rIns="91440" bIns="45720" rtlCol="0" anchor="b"/>
-          <a:lstStyle>
-            <a:lvl1pPr algn="r">
-              <a:defRPr sz="1200"/>
-            </a:lvl1pPr>
-          </a:lstStyle>
-          <a:p>
-            <a:fld id="{CE5E9CC1-C706-0F49-92D6-E571CC5EEA8F}" type="slidenum">
-              <a:rPr lang="en-US"/>
-              <a:t>‹#›</a:t>
-            </a:fld>
-            <a:endParaRPr lang="en-US"/>
-          </a:p>
-        </p:txBody>
-      </p:sp>
     </p:spTree>
     <p:extLst>
       <p:ext uri="{BB962C8B-B14F-4D97-AF65-F5344CB8AC3E}">
-        <p14:creationId xmlns:p14="http://schemas.microsoft.com/office/powerpoint/2010/main" val="1024086991"/>
+        <p14:creationId xmlns:p14="http://schemas.microsoft.com/office/powerpoint/2010/main" val="2757089441"/>
       </p:ext>
     </p:extLst>
   </p:cSld>
@@ -510,10 +291,6 @@
           <a:bodyPr/>
           <a:lstStyle/>
           <a:p>
-            <a:r>
-              <a:rPr lang="en-US" dirty="0"/>
-              <a:t/>
-            </a:r>
             <a:endParaRPr lang="en-US" dirty="0"/>
           </a:p>
         </p:txBody>
@@ -598,10 +375,6 @@
           <a:bodyPr/>
           <a:lstStyle/>
           <a:p>
-            <a:r>
-              <a:rPr lang="en-US" dirty="0"/>
-              <a:t/>
-            </a:r>
             <a:endParaRPr lang="en-US" dirty="0"/>
           </a:p>
         </p:txBody>
@@ -686,10 +459,6 @@
           <a:bodyPr/>
           <a:lstStyle/>
           <a:p>
-            <a:r>
-              <a:rPr lang="en-US" dirty="0"/>
-              <a:t/>
-            </a:r>
             <a:endParaRPr lang="en-US" dirty="0"/>
           </a:p>
         </p:txBody>
@@ -774,10 +543,6 @@
           <a:bodyPr/>
           <a:lstStyle/>
           <a:p>
-            <a:r>
-              <a:rPr lang="en-US" dirty="0"/>
-              <a:t/>
-            </a:r>
             <a:endParaRPr lang="en-US" dirty="0"/>
           </a:p>
         </p:txBody>
@@ -862,10 +627,6 @@
           <a:bodyPr/>
           <a:lstStyle/>
           <a:p>
-            <a:r>
-              <a:rPr lang="en-US" dirty="0"/>
-              <a:t/>
-            </a:r>
             <a:endParaRPr lang="en-US" dirty="0"/>
           </a:p>
         </p:txBody>
@@ -950,10 +711,6 @@
           <a:bodyPr/>
           <a:lstStyle/>
           <a:p>
-            <a:r>
-              <a:rPr lang="en-US" dirty="0"/>
-              <a:t/>
-            </a:r>
             <a:endParaRPr lang="en-US" dirty="0"/>
           </a:p>
         </p:txBody>
@@ -1038,10 +795,6 @@
           <a:bodyPr/>
           <a:lstStyle/>
           <a:p>
-            <a:r>
-              <a:rPr lang="en-US" dirty="0"/>
-              <a:t/>
-            </a:r>
             <a:endParaRPr lang="en-US" dirty="0"/>
           </a:p>
         </p:txBody>
@@ -1126,10 +879,6 @@
           <a:bodyPr/>
           <a:lstStyle/>
           <a:p>
-            <a:r>
-              <a:rPr lang="en-US" dirty="0"/>
-              <a:t/>
-            </a:r>
             <a:endParaRPr lang="en-US" dirty="0"/>
           </a:p>
         </p:txBody>
@@ -1214,10 +963,6 @@
           <a:bodyPr/>
           <a:lstStyle/>
           <a:p>
-            <a:r>
-              <a:rPr lang="en-US" dirty="0"/>
-              <a:t/>
-            </a:r>
             <a:endParaRPr lang="en-US" dirty="0"/>
           </a:p>
         </p:txBody>
@@ -1302,10 +1047,6 @@
           <a:bodyPr/>
           <a:lstStyle/>
           <a:p>
-            <a:r>
-              <a:rPr lang="en-US" dirty="0"/>
-              <a:t/>
-            </a:r>
             <a:endParaRPr lang="en-US" dirty="0"/>
           </a:p>
         </p:txBody>
@@ -1390,10 +1131,6 @@
           <a:bodyPr/>
           <a:lstStyle/>
           <a:p>
-            <a:r>
-              <a:rPr lang="en-US" dirty="0"/>
-              <a:t/>
-            </a:r>
             <a:endParaRPr lang="en-US" dirty="0"/>
           </a:p>
         </p:txBody>
@@ -1467,6 +1204,11 @@
 <file path=ppt/slideMasters/slideMaster1.xml><?xml version="1.0" encoding="utf-8"?>
 <p:sldMaster xmlns:a="http://schemas.openxmlformats.org/drawingml/2006/main" xmlns:r="http://schemas.openxmlformats.org/officeDocument/2006/relationships" xmlns:p="http://schemas.openxmlformats.org/presentationml/2006/main">
   <p:cSld>
+    <p:bg>
+      <p:bgRef idx="1001">
+        <a:schemeClr val="bg1"/>
+      </p:bgRef>
+    </p:bg>
     <p:spTree>
       <p:nvGrpSpPr>
         <p:cNvPr id="1" name=""/>
@@ -1749,6 +1491,7 @@
         <a:solidFill>
           <a:srgbClr val="1A0A14"/>
         </a:solidFill>
+        <a:effectLst/>
       </p:bgPr>
     </p:bg>
     <p:spTree>
@@ -1921,7 +1664,7 @@
           <a:bodyPr wrap="square" lIns="0" tIns="0" rIns="0" bIns="0" rtlCol="0" anchor="ctr"/>
           <a:lstStyle/>
           <a:p>
-            <a:pPr algn="ctr" indent="0" marL="0">
+            <a:pPr marL="0" indent="0" algn="ctr">
               <a:buNone/>
             </a:pPr>
             <a:r>
@@ -1984,7 +1727,7 @@
           <a:bodyPr wrap="square" lIns="0" tIns="0" rIns="0" bIns="0" rtlCol="0" anchor="ctr"/>
           <a:lstStyle/>
           <a:p>
-            <a:pPr algn="ctr" indent="0" marL="0">
+            <a:pPr marL="0" indent="0" algn="ctr">
               <a:buNone/>
             </a:pPr>
             <a:r>
@@ -2047,7 +1790,7 @@
           <a:bodyPr wrap="square" lIns="0" tIns="0" rIns="0" bIns="0" rtlCol="0" anchor="ctr"/>
           <a:lstStyle/>
           <a:p>
-            <a:pPr algn="ctr" indent="0" marL="0">
+            <a:pPr marL="0" indent="0" algn="ctr">
               <a:buNone/>
             </a:pPr>
             <a:r>
@@ -2083,7 +1826,7 @@
           <a:bodyPr wrap="square" rtlCol="0" anchor="ctr"/>
           <a:lstStyle/>
           <a:p>
-            <a:pPr algn="l" indent="0" marL="0">
+            <a:pPr marL="0" indent="0" algn="l">
               <a:buNone/>
             </a:pPr>
             <a:r>
@@ -2122,7 +1865,7 @@
           <a:bodyPr wrap="square" rtlCol="0" anchor="ctr"/>
           <a:lstStyle/>
           <a:p>
-            <a:pPr algn="l" indent="0" marL="0">
+            <a:pPr marL="0" indent="0" algn="l">
               <a:buNone/>
             </a:pPr>
             <a:r>
@@ -2161,7 +1904,7 @@
           <a:bodyPr wrap="square" rtlCol="0" anchor="ctr"/>
           <a:lstStyle/>
           <a:p>
-            <a:pPr algn="l" indent="0" marL="0">
+            <a:pPr marL="0" indent="0" algn="l">
               <a:buNone/>
             </a:pPr>
             <a:r>
@@ -2224,7 +1967,7 @@
           <a:bodyPr wrap="square" rtlCol="0" anchor="ctr"/>
           <a:lstStyle/>
           <a:p>
-            <a:pPr algn="l" indent="0" marL="0">
+            <a:pPr marL="0" indent="0" algn="l">
               <a:buNone/>
             </a:pPr>
             <a:r>
@@ -2235,9 +1978,6 @@
               </a:rPr>
               <a:t>Projet de Fin d'Études  |  </a:t>
             </a:r>
-            <a:pPr algn="l" indent="0" marL="0">
-              <a:buNone/>
-            </a:pPr>
             <a:r>
               <a:rPr lang="en-US" sz="1100" b="1" dirty="0">
                 <a:solidFill>
@@ -2246,9 +1986,6 @@
               </a:rPr>
               <a:t>5 mois  |  </a:t>
             </a:r>
-            <a:pPr algn="l" indent="0" marL="0">
-              <a:buNone/>
-            </a:pPr>
             <a:r>
               <a:rPr lang="en-US" sz="1100" dirty="0">
                 <a:solidFill>
@@ -2277,6 +2014,7 @@
         <a:solidFill>
           <a:srgbClr val="F5EEF0"/>
         </a:solidFill>
+        <a:effectLst/>
       </p:bgPr>
     </p:bg>
     <p:spTree>
@@ -2339,7 +2077,7 @@
           <a:bodyPr wrap="square" rtlCol="0" anchor="ctr"/>
           <a:lstStyle/>
           <a:p>
-            <a:pPr indent="0" marL="0">
+            <a:pPr marL="0" indent="0">
               <a:buNone/>
             </a:pPr>
             <a:r>
@@ -2378,7 +2116,7 @@
             <a:prstDash val="solid"/>
           </a:ln>
           <a:effectLst>
-            <a:outerShdw sx="100000" sy="100000" kx="0" ky="0" algn="bl" rotWithShape="0" blurRad="101600" dist="25400" dir="8100000">
+            <a:outerShdw blurRad="101600" dist="25400" dir="8100000" algn="bl" rotWithShape="0">
               <a:srgbClr val="000000">
                 <a:alpha val="10000"/>
               </a:srgbClr>
@@ -2432,7 +2170,7 @@
           <a:bodyPr wrap="square" rtlCol="0" anchor="ctr"/>
           <a:lstStyle/>
           <a:p>
-            <a:pPr indent="0" marL="0">
+            <a:pPr marL="0" indent="0">
               <a:buNone/>
             </a:pPr>
             <a:r>
@@ -2493,7 +2231,7 @@
           <a:bodyPr wrap="square" rtlCol="0" anchor="ctr"/>
           <a:lstStyle/>
           <a:p>
-            <a:pPr indent="0" marL="0">
+            <a:pPr marL="0" indent="0">
               <a:buNone/>
             </a:pPr>
             <a:r>
@@ -2554,7 +2292,7 @@
           <a:bodyPr wrap="square" rtlCol="0" anchor="ctr"/>
           <a:lstStyle/>
           <a:p>
-            <a:pPr indent="0" marL="0">
+            <a:pPr marL="0" indent="0">
               <a:buNone/>
             </a:pPr>
             <a:r>
@@ -2615,7 +2353,7 @@
           <a:bodyPr wrap="square" rtlCol="0" anchor="ctr"/>
           <a:lstStyle/>
           <a:p>
-            <a:pPr indent="0" marL="0">
+            <a:pPr marL="0" indent="0">
               <a:buNone/>
             </a:pPr>
             <a:r>
@@ -2676,7 +2414,7 @@
           <a:bodyPr wrap="square" rtlCol="0" anchor="ctr"/>
           <a:lstStyle/>
           <a:p>
-            <a:pPr indent="0" marL="0">
+            <a:pPr marL="0" indent="0">
               <a:buNone/>
             </a:pPr>
             <a:r>
@@ -2715,7 +2453,7 @@
             <a:prstDash val="solid"/>
           </a:ln>
           <a:effectLst>
-            <a:outerShdw sx="100000" sy="100000" kx="0" ky="0" algn="bl" rotWithShape="0" blurRad="101600" dist="25400" dir="8100000">
+            <a:outerShdw blurRad="101600" dist="25400" dir="8100000" algn="bl" rotWithShape="0">
               <a:srgbClr val="000000">
                 <a:alpha val="10000"/>
               </a:srgbClr>
@@ -2769,7 +2507,7 @@
           <a:bodyPr wrap="square" rtlCol="0" anchor="ctr"/>
           <a:lstStyle/>
           <a:p>
-            <a:pPr indent="0" marL="0">
+            <a:pPr marL="0" indent="0">
               <a:buNone/>
             </a:pPr>
             <a:r>
@@ -2830,7 +2568,7 @@
           <a:bodyPr wrap="square" rtlCol="0" anchor="ctr"/>
           <a:lstStyle/>
           <a:p>
-            <a:pPr indent="0" marL="0">
+            <a:pPr marL="0" indent="0">
               <a:buNone/>
             </a:pPr>
             <a:r>
@@ -2891,7 +2629,7 @@
           <a:bodyPr wrap="square" rtlCol="0" anchor="ctr"/>
           <a:lstStyle/>
           <a:p>
-            <a:pPr indent="0" marL="0">
+            <a:pPr marL="0" indent="0">
               <a:buNone/>
             </a:pPr>
             <a:r>
@@ -2952,7 +2690,7 @@
           <a:bodyPr wrap="square" rtlCol="0" anchor="ctr"/>
           <a:lstStyle/>
           <a:p>
-            <a:pPr indent="0" marL="0">
+            <a:pPr marL="0" indent="0">
               <a:buNone/>
             </a:pPr>
             <a:r>
@@ -3013,7 +2751,7 @@
           <a:bodyPr wrap="square" rtlCol="0" anchor="ctr"/>
           <a:lstStyle/>
           <a:p>
-            <a:pPr indent="0" marL="0">
+            <a:pPr marL="0" indent="0">
               <a:buNone/>
             </a:pPr>
             <a:r>
@@ -3052,7 +2790,7 @@
             <a:prstDash val="solid"/>
           </a:ln>
           <a:effectLst>
-            <a:outerShdw sx="100000" sy="100000" kx="0" ky="0" algn="bl" rotWithShape="0" blurRad="101600" dist="25400" dir="8100000">
+            <a:outerShdw blurRad="101600" dist="25400" dir="8100000" algn="bl" rotWithShape="0">
               <a:srgbClr val="000000">
                 <a:alpha val="10000"/>
               </a:srgbClr>
@@ -3106,7 +2844,7 @@
           <a:bodyPr wrap="square" rtlCol="0" anchor="ctr"/>
           <a:lstStyle/>
           <a:p>
-            <a:pPr indent="0" marL="0">
+            <a:pPr marL="0" indent="0">
               <a:buNone/>
             </a:pPr>
             <a:r>
@@ -3167,7 +2905,7 @@
           <a:bodyPr wrap="square" rtlCol="0" anchor="ctr"/>
           <a:lstStyle/>
           <a:p>
-            <a:pPr indent="0" marL="0">
+            <a:pPr marL="0" indent="0">
               <a:buNone/>
             </a:pPr>
             <a:r>
@@ -3228,7 +2966,7 @@
           <a:bodyPr wrap="square" rtlCol="0" anchor="ctr"/>
           <a:lstStyle/>
           <a:p>
-            <a:pPr indent="0" marL="0">
+            <a:pPr marL="0" indent="0">
               <a:buNone/>
             </a:pPr>
             <a:r>
@@ -3289,7 +3027,7 @@
           <a:bodyPr wrap="square" rtlCol="0" anchor="ctr"/>
           <a:lstStyle/>
           <a:p>
-            <a:pPr indent="0" marL="0">
+            <a:pPr marL="0" indent="0">
               <a:buNone/>
             </a:pPr>
             <a:r>
@@ -3350,7 +3088,7 @@
           <a:bodyPr wrap="square" rtlCol="0" anchor="ctr"/>
           <a:lstStyle/>
           <a:p>
-            <a:pPr indent="0" marL="0">
+            <a:pPr marL="0" indent="0">
               <a:buNone/>
             </a:pPr>
             <a:r>
@@ -3389,7 +3127,7 @@
             <a:prstDash val="solid"/>
           </a:ln>
           <a:effectLst>
-            <a:outerShdw sx="100000" sy="100000" kx="0" ky="0" algn="bl" rotWithShape="0" blurRad="101600" dist="25400" dir="8100000">
+            <a:outerShdw blurRad="101600" dist="25400" dir="8100000" algn="bl" rotWithShape="0">
               <a:srgbClr val="000000">
                 <a:alpha val="10000"/>
               </a:srgbClr>
@@ -3443,7 +3181,7 @@
           <a:bodyPr wrap="square" rtlCol="0" anchor="ctr"/>
           <a:lstStyle/>
           <a:p>
-            <a:pPr indent="0" marL="0">
+            <a:pPr marL="0" indent="0">
               <a:buNone/>
             </a:pPr>
             <a:r>
@@ -3504,7 +3242,7 @@
           <a:bodyPr wrap="square" rtlCol="0" anchor="ctr"/>
           <a:lstStyle/>
           <a:p>
-            <a:pPr indent="0" marL="0">
+            <a:pPr marL="0" indent="0">
               <a:buNone/>
             </a:pPr>
             <a:r>
@@ -3565,7 +3303,7 @@
           <a:bodyPr wrap="square" rtlCol="0" anchor="ctr"/>
           <a:lstStyle/>
           <a:p>
-            <a:pPr indent="0" marL="0">
+            <a:pPr marL="0" indent="0">
               <a:buNone/>
             </a:pPr>
             <a:r>
@@ -3626,7 +3364,7 @@
           <a:bodyPr wrap="square" rtlCol="0" anchor="ctr"/>
           <a:lstStyle/>
           <a:p>
-            <a:pPr indent="0" marL="0">
+            <a:pPr marL="0" indent="0">
               <a:buNone/>
             </a:pPr>
             <a:r>
@@ -3687,7 +3425,7 @@
           <a:bodyPr wrap="square" rtlCol="0" anchor="ctr"/>
           <a:lstStyle/>
           <a:p>
-            <a:pPr indent="0" marL="0">
+            <a:pPr marL="0" indent="0">
               <a:buNone/>
             </a:pPr>
             <a:r>
@@ -3748,7 +3486,7 @@
           <a:bodyPr wrap="square" rtlCol="0" anchor="ctr"/>
           <a:lstStyle/>
           <a:p>
-            <a:pPr indent="0" marL="0">
+            <a:pPr marL="0" indent="0">
               <a:buNone/>
             </a:pPr>
             <a:r>
@@ -3759,9 +3497,6 @@
               </a:rPr>
               <a:t>Sources clés : </a:t>
             </a:r>
-            <a:pPr indent="0" marL="0">
-              <a:buNone/>
-            </a:pPr>
             <a:r>
               <a:rPr lang="en-US" sz="1000" dirty="0">
                 <a:solidFill>
@@ -3790,6 +3525,7 @@
         <a:solidFill>
           <a:srgbClr val="1A0A14"/>
         </a:solidFill>
+        <a:effectLst/>
       </p:bgPr>
     </p:bg>
     <p:spTree>
@@ -3906,7 +3642,7 @@
           <a:bodyPr wrap="square" rtlCol="0" anchor="ctr"/>
           <a:lstStyle/>
           <a:p>
-            <a:pPr indent="0" marL="0">
+            <a:pPr marL="0" indent="0">
               <a:buNone/>
             </a:pPr>
             <a:r>
@@ -3942,7 +3678,7 @@
           <a:bodyPr wrap="square" rtlCol="0" anchor="ctr"/>
           <a:lstStyle/>
           <a:p>
-            <a:pPr indent="0" marL="0">
+            <a:pPr marL="0" indent="0">
               <a:buNone/>
             </a:pPr>
             <a:r>
@@ -3981,7 +3717,7 @@
           <a:bodyPr wrap="square" rtlCol="0" anchor="ctr"/>
           <a:lstStyle/>
           <a:p>
-            <a:pPr indent="0" marL="0">
+            <a:pPr marL="0" indent="0">
               <a:buNone/>
             </a:pPr>
             <a:r>
@@ -4044,7 +3780,7 @@
           <a:bodyPr wrap="square" rtlCol="0" anchor="ctr"/>
           <a:lstStyle/>
           <a:p>
-            <a:pPr indent="0" marL="0">
+            <a:pPr marL="0" indent="0">
               <a:buNone/>
             </a:pPr>
             <a:r>
@@ -4107,7 +3843,7 @@
           <a:bodyPr wrap="square" rtlCol="0" anchor="ctr"/>
           <a:lstStyle/>
           <a:p>
-            <a:pPr indent="0" marL="0">
+            <a:pPr marL="0" indent="0">
               <a:buNone/>
             </a:pPr>
             <a:r>
@@ -4170,7 +3906,7 @@
           <a:bodyPr wrap="square" rtlCol="0" anchor="ctr"/>
           <a:lstStyle/>
           <a:p>
-            <a:pPr indent="0" marL="0">
+            <a:pPr marL="0" indent="0">
               <a:buNone/>
             </a:pPr>
             <a:r>
@@ -4233,7 +3969,7 @@
           <a:bodyPr wrap="square" rtlCol="0" anchor="ctr"/>
           <a:lstStyle/>
           <a:p>
-            <a:pPr indent="0" marL="0">
+            <a:pPr marL="0" indent="0">
               <a:buNone/>
             </a:pPr>
             <a:r>
@@ -4296,7 +4032,7 @@
           <a:bodyPr wrap="square" rtlCol="0" anchor="ctr"/>
           <a:lstStyle/>
           <a:p>
-            <a:pPr indent="0" marL="0">
+            <a:pPr marL="0" indent="0">
               <a:buNone/>
             </a:pPr>
             <a:r>
@@ -4359,7 +4095,7 @@
           <a:bodyPr wrap="square" rtlCol="0" anchor="ctr"/>
           <a:lstStyle/>
           <a:p>
-            <a:pPr indent="0" marL="0">
+            <a:pPr marL="0" indent="0">
               <a:buNone/>
             </a:pPr>
             <a:r>
@@ -4422,7 +4158,7 @@
           <a:bodyPr wrap="square" rtlCol="0" anchor="ctr"/>
           <a:lstStyle/>
           <a:p>
-            <a:pPr indent="0" marL="0">
+            <a:pPr marL="0" indent="0">
               <a:buNone/>
             </a:pPr>
             <a:r>
@@ -4433,9 +4169,6 @@
               </a:rPr>
               <a:t>Prochaine étape : </a:t>
             </a:r>
-            <a:pPr indent="0" marL="0">
-              <a:buNone/>
-            </a:pPr>
             <a:r>
               <a:rPr lang="en-US" sz="1100" dirty="0">
                 <a:solidFill>
@@ -4469,7 +4202,7 @@
           <a:bodyPr wrap="square" rtlCol="0" anchor="ctr"/>
           <a:lstStyle/>
           <a:p>
-            <a:pPr algn="ctr" indent="0" marL="0">
+            <a:pPr marL="0" indent="0" algn="ctr">
               <a:buNone/>
             </a:pPr>
             <a:r>
@@ -4500,6 +4233,7 @@
         <a:solidFill>
           <a:srgbClr val="F5EEF0"/>
         </a:solidFill>
+        <a:effectLst/>
       </p:bgPr>
     </p:bg>
     <p:spTree>
@@ -4562,7 +4296,7 @@
           <a:bodyPr wrap="square" rtlCol="0" anchor="ctr"/>
           <a:lstStyle/>
           <a:p>
-            <a:pPr indent="0" marL="0">
+            <a:pPr marL="0" indent="0">
               <a:buNone/>
             </a:pPr>
             <a:r>
@@ -4604,7 +4338,7 @@
             <a:prstDash val="solid"/>
           </a:ln>
           <a:effectLst>
-            <a:outerShdw sx="100000" sy="100000" kx="0" ky="0" algn="bl" rotWithShape="0" blurRad="101600" dist="25400" dir="8100000">
+            <a:outerShdw blurRad="101600" dist="25400" dir="8100000" algn="bl" rotWithShape="0">
               <a:srgbClr val="000000">
                 <a:alpha val="10000"/>
               </a:srgbClr>
@@ -4658,7 +4392,7 @@
           <a:bodyPr wrap="square" rtlCol="0" anchor="ctr"/>
           <a:lstStyle/>
           <a:p>
-            <a:pPr indent="0" marL="0">
+            <a:pPr marL="0" indent="0">
               <a:buNone/>
             </a:pPr>
             <a:r>
@@ -4697,7 +4431,7 @@
           <a:bodyPr wrap="square" rtlCol="0" anchor="ctr"/>
           <a:lstStyle/>
           <a:p>
-            <a:pPr indent="0" marL="0">
+            <a:pPr marL="0" indent="0">
               <a:buNone/>
             </a:pPr>
             <a:r>
@@ -4733,7 +4467,7 @@
           <a:bodyPr wrap="square" rtlCol="0" anchor="ctr"/>
           <a:lstStyle/>
           <a:p>
-            <a:pPr indent="0" marL="0">
+            <a:pPr marL="0" indent="0">
               <a:buNone/>
             </a:pPr>
             <a:r>
@@ -4772,7 +4506,7 @@
             <a:prstDash val="solid"/>
           </a:ln>
           <a:effectLst>
-            <a:outerShdw sx="100000" sy="100000" kx="0" ky="0" algn="bl" rotWithShape="0" blurRad="101600" dist="25400" dir="8100000">
+            <a:outerShdw blurRad="101600" dist="25400" dir="8100000" algn="bl" rotWithShape="0">
               <a:srgbClr val="000000">
                 <a:alpha val="10000"/>
               </a:srgbClr>
@@ -4826,7 +4560,7 @@
           <a:bodyPr wrap="square" rtlCol="0" anchor="ctr"/>
           <a:lstStyle/>
           <a:p>
-            <a:pPr indent="0" marL="0">
+            <a:pPr marL="0" indent="0">
               <a:buNone/>
             </a:pPr>
             <a:r>
@@ -4865,7 +4599,7 @@
           <a:bodyPr wrap="square" rtlCol="0" anchor="ctr"/>
           <a:lstStyle/>
           <a:p>
-            <a:pPr indent="0" marL="0">
+            <a:pPr marL="0" indent="0">
               <a:buNone/>
             </a:pPr>
             <a:r>
@@ -4901,7 +4635,7 @@
           <a:bodyPr wrap="square" rtlCol="0" anchor="ctr"/>
           <a:lstStyle/>
           <a:p>
-            <a:pPr indent="0" marL="0">
+            <a:pPr marL="0" indent="0">
               <a:buNone/>
             </a:pPr>
             <a:r>
@@ -4940,7 +4674,7 @@
             <a:prstDash val="solid"/>
           </a:ln>
           <a:effectLst>
-            <a:outerShdw sx="100000" sy="100000" kx="0" ky="0" algn="bl" rotWithShape="0" blurRad="101600" dist="25400" dir="8100000">
+            <a:outerShdw blurRad="101600" dist="25400" dir="8100000" algn="bl" rotWithShape="0">
               <a:srgbClr val="000000">
                 <a:alpha val="10000"/>
               </a:srgbClr>
@@ -4994,7 +4728,7 @@
           <a:bodyPr wrap="square" rtlCol="0" anchor="ctr"/>
           <a:lstStyle/>
           <a:p>
-            <a:pPr indent="0" marL="0">
+            <a:pPr marL="0" indent="0">
               <a:buNone/>
             </a:pPr>
             <a:r>
@@ -5033,7 +4767,7 @@
           <a:bodyPr wrap="square" rtlCol="0" anchor="ctr"/>
           <a:lstStyle/>
           <a:p>
-            <a:pPr indent="0" marL="0">
+            <a:pPr marL="0" indent="0">
               <a:buNone/>
             </a:pPr>
             <a:r>
@@ -5069,7 +4803,7 @@
           <a:bodyPr wrap="square" rtlCol="0" anchor="ctr"/>
           <a:lstStyle/>
           <a:p>
-            <a:pPr indent="0" marL="0">
+            <a:pPr marL="0" indent="0">
               <a:buNone/>
             </a:pPr>
             <a:r>
@@ -5108,7 +4842,7 @@
             <a:prstDash val="solid"/>
           </a:ln>
           <a:effectLst>
-            <a:outerShdw sx="100000" sy="100000" kx="0" ky="0" algn="bl" rotWithShape="0" blurRad="101600" dist="25400" dir="8100000">
+            <a:outerShdw blurRad="101600" dist="25400" dir="8100000" algn="bl" rotWithShape="0">
               <a:srgbClr val="000000">
                 <a:alpha val="10000"/>
               </a:srgbClr>
@@ -5162,7 +4896,7 @@
           <a:bodyPr wrap="square" rtlCol="0" anchor="ctr"/>
           <a:lstStyle/>
           <a:p>
-            <a:pPr indent="0" marL="0">
+            <a:pPr marL="0" indent="0">
               <a:buNone/>
             </a:pPr>
             <a:r>
@@ -5201,7 +4935,7 @@
           <a:bodyPr wrap="square" rtlCol="0" anchor="ctr"/>
           <a:lstStyle/>
           <a:p>
-            <a:pPr indent="0" marL="0">
+            <a:pPr marL="0" indent="0">
               <a:buNone/>
             </a:pPr>
             <a:r>
@@ -5237,7 +4971,7 @@
           <a:bodyPr wrap="square" rtlCol="0" anchor="ctr"/>
           <a:lstStyle/>
           <a:p>
-            <a:pPr indent="0" marL="0">
+            <a:pPr marL="0" indent="0">
               <a:buNone/>
             </a:pPr>
             <a:r>
@@ -5276,7 +5010,7 @@
             <a:prstDash val="solid"/>
           </a:ln>
           <a:effectLst>
-            <a:outerShdw sx="100000" sy="100000" kx="0" ky="0" algn="bl" rotWithShape="0" blurRad="101600" dist="25400" dir="8100000">
+            <a:outerShdw blurRad="101600" dist="25400" dir="8100000" algn="bl" rotWithShape="0">
               <a:srgbClr val="000000">
                 <a:alpha val="10000"/>
               </a:srgbClr>
@@ -5330,7 +5064,7 @@
           <a:bodyPr wrap="square" rtlCol="0" anchor="ctr"/>
           <a:lstStyle/>
           <a:p>
-            <a:pPr indent="0" marL="0">
+            <a:pPr marL="0" indent="0">
               <a:buNone/>
             </a:pPr>
             <a:r>
@@ -5369,7 +5103,7 @@
           <a:bodyPr wrap="square" rtlCol="0" anchor="ctr"/>
           <a:lstStyle/>
           <a:p>
-            <a:pPr indent="0" marL="0">
+            <a:pPr marL="0" indent="0">
               <a:buNone/>
             </a:pPr>
             <a:r>
@@ -5405,7 +5139,7 @@
           <a:bodyPr wrap="square" rtlCol="0" anchor="ctr"/>
           <a:lstStyle/>
           <a:p>
-            <a:pPr indent="0" marL="0">
+            <a:pPr marL="0" indent="0">
               <a:buNone/>
             </a:pPr>
             <a:r>
@@ -5444,7 +5178,7 @@
             <a:prstDash val="solid"/>
           </a:ln>
           <a:effectLst>
-            <a:outerShdw sx="100000" sy="100000" kx="0" ky="0" algn="bl" rotWithShape="0" blurRad="101600" dist="25400" dir="8100000">
+            <a:outerShdw blurRad="101600" dist="25400" dir="8100000" algn="bl" rotWithShape="0">
               <a:srgbClr val="000000">
                 <a:alpha val="10000"/>
               </a:srgbClr>
@@ -5498,7 +5232,7 @@
           <a:bodyPr wrap="square" rtlCol="0" anchor="ctr"/>
           <a:lstStyle/>
           <a:p>
-            <a:pPr indent="0" marL="0">
+            <a:pPr marL="0" indent="0">
               <a:buNone/>
             </a:pPr>
             <a:r>
@@ -5537,7 +5271,7 @@
           <a:bodyPr wrap="square" rtlCol="0" anchor="ctr"/>
           <a:lstStyle/>
           <a:p>
-            <a:pPr indent="0" marL="0">
+            <a:pPr marL="0" indent="0">
               <a:buNone/>
             </a:pPr>
             <a:r>
@@ -5573,7 +5307,7 @@
           <a:bodyPr wrap="square" rtlCol="0" anchor="ctr"/>
           <a:lstStyle/>
           <a:p>
-            <a:pPr indent="0" marL="0">
+            <a:pPr marL="0" indent="0">
               <a:buNone/>
             </a:pPr>
             <a:r>
@@ -5604,6 +5338,7 @@
         <a:solidFill>
           <a:srgbClr val="F5EEF0"/>
         </a:solidFill>
+        <a:effectLst/>
       </p:bgPr>
     </p:bg>
     <p:spTree>
@@ -5666,7 +5401,7 @@
           <a:bodyPr wrap="square" rtlCol="0" anchor="ctr"/>
           <a:lstStyle/>
           <a:p>
-            <a:pPr indent="0" marL="0">
+            <a:pPr marL="0" indent="0">
               <a:buNone/>
             </a:pPr>
             <a:r>
@@ -5705,7 +5440,7 @@
             <a:prstDash val="solid"/>
           </a:ln>
           <a:effectLst>
-            <a:outerShdw sx="100000" sy="100000" kx="0" ky="0" algn="bl" rotWithShape="0" blurRad="101600" dist="25400" dir="8100000">
+            <a:outerShdw blurRad="101600" dist="25400" dir="8100000" algn="bl" rotWithShape="0">
               <a:srgbClr val="000000">
                 <a:alpha val="10000"/>
               </a:srgbClr>
@@ -5759,7 +5494,7 @@
           <a:bodyPr wrap="square" rtlCol="0" anchor="ctr"/>
           <a:lstStyle/>
           <a:p>
-            <a:pPr algn="ctr" indent="0" marL="0">
+            <a:pPr marL="0" indent="0" algn="ctr">
               <a:buNone/>
             </a:pPr>
             <a:r>
@@ -5798,7 +5533,7 @@
           <a:bodyPr wrap="square" rtlCol="0" anchor="ctr"/>
           <a:lstStyle/>
           <a:p>
-            <a:pPr algn="ctr" indent="0" marL="0">
+            <a:pPr marL="0" indent="0" algn="ctr">
               <a:buNone/>
             </a:pPr>
             <a:r>
@@ -5812,7 +5547,7 @@
             <a:endParaRPr lang="en-US" sz="1000" dirty="0"/>
           </a:p>
           <a:p>
-            <a:pPr algn="ctr" indent="0" marL="0">
+            <a:pPr marL="0" indent="0" algn="ctr">
               <a:buNone/>
             </a:pPr>
             <a:r>
@@ -5851,7 +5586,7 @@
             <a:prstDash val="solid"/>
           </a:ln>
           <a:effectLst>
-            <a:outerShdw sx="100000" sy="100000" kx="0" ky="0" algn="bl" rotWithShape="0" blurRad="101600" dist="25400" dir="8100000">
+            <a:outerShdw blurRad="101600" dist="25400" dir="8100000" algn="bl" rotWithShape="0">
               <a:srgbClr val="000000">
                 <a:alpha val="10000"/>
               </a:srgbClr>
@@ -5905,7 +5640,7 @@
           <a:bodyPr wrap="square" rtlCol="0" anchor="ctr"/>
           <a:lstStyle/>
           <a:p>
-            <a:pPr algn="ctr" indent="0" marL="0">
+            <a:pPr marL="0" indent="0" algn="ctr">
               <a:buNone/>
             </a:pPr>
             <a:r>
@@ -5944,7 +5679,7 @@
           <a:bodyPr wrap="square" rtlCol="0" anchor="ctr"/>
           <a:lstStyle/>
           <a:p>
-            <a:pPr algn="ctr" indent="0" marL="0">
+            <a:pPr marL="0" indent="0" algn="ctr">
               <a:buNone/>
             </a:pPr>
             <a:r>
@@ -5958,7 +5693,7 @@
             <a:endParaRPr lang="en-US" sz="1000" dirty="0"/>
           </a:p>
           <a:p>
-            <a:pPr algn="ctr" indent="0" marL="0">
+            <a:pPr marL="0" indent="0" algn="ctr">
               <a:buNone/>
             </a:pPr>
             <a:r>
@@ -5997,7 +5732,7 @@
             <a:prstDash val="solid"/>
           </a:ln>
           <a:effectLst>
-            <a:outerShdw sx="100000" sy="100000" kx="0" ky="0" algn="bl" rotWithShape="0" blurRad="101600" dist="25400" dir="8100000">
+            <a:outerShdw blurRad="101600" dist="25400" dir="8100000" algn="bl" rotWithShape="0">
               <a:srgbClr val="000000">
                 <a:alpha val="10000"/>
               </a:srgbClr>
@@ -6051,7 +5786,7 @@
           <a:bodyPr wrap="square" rtlCol="0" anchor="ctr"/>
           <a:lstStyle/>
           <a:p>
-            <a:pPr algn="ctr" indent="0" marL="0">
+            <a:pPr marL="0" indent="0" algn="ctr">
               <a:buNone/>
             </a:pPr>
             <a:r>
@@ -6090,7 +5825,7 @@
           <a:bodyPr wrap="square" rtlCol="0" anchor="ctr"/>
           <a:lstStyle/>
           <a:p>
-            <a:pPr algn="ctr" indent="0" marL="0">
+            <a:pPr marL="0" indent="0" algn="ctr">
               <a:buNone/>
             </a:pPr>
             <a:r>
@@ -6104,7 +5839,7 @@
             <a:endParaRPr lang="en-US" sz="1000" dirty="0"/>
           </a:p>
           <a:p>
-            <a:pPr algn="ctr" indent="0" marL="0">
+            <a:pPr marL="0" indent="0" algn="ctr">
               <a:buNone/>
             </a:pPr>
             <a:r>
@@ -6143,7 +5878,7 @@
             <a:prstDash val="solid"/>
           </a:ln>
           <a:effectLst>
-            <a:outerShdw sx="100000" sy="100000" kx="0" ky="0" algn="bl" rotWithShape="0" blurRad="101600" dist="25400" dir="8100000">
+            <a:outerShdw blurRad="101600" dist="25400" dir="8100000" algn="bl" rotWithShape="0">
               <a:srgbClr val="000000">
                 <a:alpha val="10000"/>
               </a:srgbClr>
@@ -6197,7 +5932,7 @@
           <a:bodyPr wrap="square" rtlCol="0" anchor="ctr"/>
           <a:lstStyle/>
           <a:p>
-            <a:pPr algn="ctr" indent="0" marL="0">
+            <a:pPr marL="0" indent="0" algn="ctr">
               <a:buNone/>
             </a:pPr>
             <a:r>
@@ -6236,7 +5971,7 @@
           <a:bodyPr wrap="square" rtlCol="0" anchor="ctr"/>
           <a:lstStyle/>
           <a:p>
-            <a:pPr algn="ctr" indent="0" marL="0">
+            <a:pPr marL="0" indent="0" algn="ctr">
               <a:buNone/>
             </a:pPr>
             <a:r>
@@ -6250,7 +5985,7 @@
             <a:endParaRPr lang="en-US" sz="1000" dirty="0"/>
           </a:p>
           <a:p>
-            <a:pPr algn="ctr" indent="0" marL="0">
+            <a:pPr marL="0" indent="0" algn="ctr">
               <a:buNone/>
             </a:pPr>
             <a:r>
@@ -6286,7 +6021,7 @@
           <a:bodyPr wrap="square" rtlCol="0" anchor="ctr"/>
           <a:lstStyle/>
           <a:p>
-            <a:pPr indent="0" marL="0">
+            <a:pPr marL="0" indent="0">
               <a:buNone/>
             </a:pPr>
             <a:r>
@@ -6325,7 +6060,7 @@
             <a:prstDash val="solid"/>
           </a:ln>
           <a:effectLst>
-            <a:outerShdw sx="100000" sy="100000" kx="0" ky="0" algn="bl" rotWithShape="0" blurRad="101600" dist="25400" dir="8100000">
+            <a:outerShdw blurRad="101600" dist="25400" dir="8100000" algn="bl" rotWithShape="0">
               <a:srgbClr val="000000">
                 <a:alpha val="10000"/>
               </a:srgbClr>
@@ -6379,7 +6114,7 @@
           <a:bodyPr wrap="square" rtlCol="0" anchor="ctr"/>
           <a:lstStyle/>
           <a:p>
-            <a:pPr indent="0" marL="0">
+            <a:pPr marL="0" indent="0">
               <a:buNone/>
             </a:pPr>
             <a:r>
@@ -6415,7 +6150,7 @@
           <a:bodyPr wrap="square" rtlCol="0" anchor="ctr"/>
           <a:lstStyle/>
           <a:p>
-            <a:pPr indent="0" marL="0">
+            <a:pPr marL="0" indent="0">
               <a:buNone/>
             </a:pPr>
             <a:r>
@@ -6438,8 +6173,8 @@
         </p:nvSpPr>
         <p:spPr>
           <a:xfrm>
-            <a:off x="2514600" y="3593592"/>
-            <a:ext cx="2090318" cy="256032"/>
+            <a:off x="1881707" y="3638212"/>
+            <a:ext cx="1645428" cy="256032"/>
           </a:xfrm>
           <a:prstGeom prst="roundRect">
             <a:avLst>
@@ -6465,8 +6200,8 @@
         </p:nvSpPr>
         <p:spPr>
           <a:xfrm>
-            <a:off x="2514600" y="3593592"/>
-            <a:ext cx="2090318" cy="256032"/>
+            <a:off x="2072097" y="3646255"/>
+            <a:ext cx="1300075" cy="256032"/>
           </a:xfrm>
           <a:prstGeom prst="rect">
             <a:avLst/>
@@ -6478,7 +6213,7 @@
           <a:bodyPr wrap="square" lIns="0" tIns="0" rIns="0" bIns="0" rtlCol="0" anchor="ctr"/>
           <a:lstStyle/>
           <a:p>
-            <a:pPr algn="ctr" indent="0" marL="0">
+            <a:pPr marL="0" indent="0" algn="ctr">
               <a:buNone/>
             </a:pPr>
             <a:r>
@@ -6501,8 +6236,8 @@
         </p:nvSpPr>
         <p:spPr>
           <a:xfrm>
-            <a:off x="4714646" y="3593592"/>
-            <a:ext cx="2251253" cy="256032"/>
+            <a:off x="3721524" y="3646255"/>
+            <a:ext cx="1798743" cy="256032"/>
           </a:xfrm>
           <a:prstGeom prst="roundRect">
             <a:avLst>
@@ -6528,8 +6263,8 @@
         </p:nvSpPr>
         <p:spPr>
           <a:xfrm>
-            <a:off x="4714646" y="3593592"/>
-            <a:ext cx="2251253" cy="256032"/>
+            <a:off x="3935639" y="3631777"/>
+            <a:ext cx="1272721" cy="256032"/>
           </a:xfrm>
           <a:prstGeom prst="rect">
             <a:avLst/>
@@ -6541,7 +6276,7 @@
           <a:bodyPr wrap="square" lIns="0" tIns="0" rIns="0" bIns="0" rtlCol="0" anchor="ctr"/>
           <a:lstStyle/>
           <a:p>
-            <a:pPr algn="ctr" indent="0" marL="0">
+            <a:pPr marL="0" indent="0" algn="ctr">
               <a:buNone/>
             </a:pPr>
             <a:r>
@@ -6564,7 +6299,7 @@
         </p:nvSpPr>
         <p:spPr>
           <a:xfrm>
-            <a:off x="7075627" y="3593592"/>
+            <a:off x="5688481" y="3662588"/>
             <a:ext cx="1607515" cy="256032"/>
           </a:xfrm>
           <a:prstGeom prst="roundRect">
@@ -6591,8 +6326,8 @@
         </p:nvSpPr>
         <p:spPr>
           <a:xfrm>
-            <a:off x="7075627" y="3593592"/>
-            <a:ext cx="1607515" cy="256032"/>
+            <a:off x="5869619" y="3662588"/>
+            <a:ext cx="1171644" cy="256032"/>
           </a:xfrm>
           <a:prstGeom prst="rect">
             <a:avLst/>
@@ -6604,7 +6339,7 @@
           <a:bodyPr wrap="square" lIns="0" tIns="0" rIns="0" bIns="0" rtlCol="0" anchor="ctr"/>
           <a:lstStyle/>
           <a:p>
-            <a:pPr algn="ctr" indent="0" marL="0">
+            <a:pPr marL="0" indent="0" algn="ctr">
               <a:buNone/>
             </a:pPr>
             <a:r>
@@ -6627,8 +6362,8 @@
         </p:nvSpPr>
         <p:spPr>
           <a:xfrm>
-            <a:off x="8792870" y="3593592"/>
-            <a:ext cx="2653589" cy="256032"/>
+            <a:off x="7376505" y="3653444"/>
+            <a:ext cx="1483016" cy="256032"/>
           </a:xfrm>
           <a:prstGeom prst="roundRect">
             <a:avLst>
@@ -6654,8 +6389,8 @@
         </p:nvSpPr>
         <p:spPr>
           <a:xfrm>
-            <a:off x="8792870" y="3593592"/>
-            <a:ext cx="2653589" cy="256032"/>
+            <a:off x="7441869" y="3653444"/>
+            <a:ext cx="1417652" cy="256032"/>
           </a:xfrm>
           <a:prstGeom prst="rect">
             <a:avLst/>
@@ -6667,7 +6402,7 @@
           <a:bodyPr wrap="square" lIns="0" tIns="0" rIns="0" bIns="0" rtlCol="0" anchor="ctr"/>
           <a:lstStyle/>
           <a:p>
-            <a:pPr algn="ctr" indent="0" marL="0">
+            <a:pPr marL="0" indent="0" algn="ctr">
               <a:buNone/>
             </a:pPr>
             <a:r>
@@ -6703,7 +6438,7 @@
           <a:bodyPr wrap="square" rtlCol="0" anchor="ctr"/>
           <a:lstStyle/>
           <a:p>
-            <a:pPr indent="0" marL="0">
+            <a:pPr marL="0" indent="0">
               <a:buNone/>
             </a:pPr>
             <a:r>
@@ -6714,9 +6449,6 @@
               </a:rPr>
               <a:t>Présence digitale existante : </a:t>
             </a:r>
-            <a:pPr indent="0" marL="0">
-              <a:buNone/>
-            </a:pPr>
             <a:r>
               <a:rPr lang="en-US" sz="1200" dirty="0">
                 <a:solidFill>
@@ -6745,6 +6477,7 @@
         <a:solidFill>
           <a:srgbClr val="F5EEF0"/>
         </a:solidFill>
+        <a:effectLst/>
       </p:bgPr>
     </p:bg>
     <p:spTree>
@@ -6807,7 +6540,7 @@
           <a:bodyPr wrap="square" rtlCol="0" anchor="ctr"/>
           <a:lstStyle/>
           <a:p>
-            <a:pPr indent="0" marL="0">
+            <a:pPr marL="0" indent="0">
               <a:buNone/>
             </a:pPr>
             <a:r>
@@ -6846,7 +6579,7 @@
             <a:prstDash val="solid"/>
           </a:ln>
           <a:effectLst>
-            <a:outerShdw sx="100000" sy="100000" kx="0" ky="0" algn="bl" rotWithShape="0" blurRad="101600" dist="25400" dir="8100000">
+            <a:outerShdw blurRad="101600" dist="25400" dir="8100000" algn="bl" rotWithShape="0">
               <a:srgbClr val="000000">
                 <a:alpha val="10000"/>
               </a:srgbClr>
@@ -6927,7 +6660,7 @@
           <a:bodyPr wrap="square" lIns="0" tIns="0" rIns="0" bIns="0" rtlCol="0" anchor="ctr"/>
           <a:lstStyle/>
           <a:p>
-            <a:pPr algn="ctr" indent="0" marL="0">
+            <a:pPr marL="0" indent="0" algn="ctr">
               <a:buNone/>
             </a:pPr>
             <a:r>
@@ -6963,7 +6696,7 @@
           <a:bodyPr wrap="square" rtlCol="0" anchor="ctr"/>
           <a:lstStyle/>
           <a:p>
-            <a:pPr indent="0" marL="0">
+            <a:pPr marL="0" indent="0">
               <a:buNone/>
             </a:pPr>
             <a:r>
@@ -7028,7 +6761,7 @@
           <a:bodyPr wrap="square" lIns="0" tIns="0" rIns="0" bIns="0" rtlCol="0" anchor="ctr"/>
           <a:lstStyle/>
           <a:p>
-            <a:pPr algn="ctr" indent="0" marL="0">
+            <a:pPr marL="0" indent="0" algn="ctr">
               <a:buNone/>
             </a:pPr>
             <a:r>
@@ -7064,7 +6797,7 @@
           <a:bodyPr wrap="square" rtlCol="0" anchor="ctr"/>
           <a:lstStyle/>
           <a:p>
-            <a:pPr indent="0" marL="0">
+            <a:pPr marL="0" indent="0">
               <a:buNone/>
             </a:pPr>
             <a:r>
@@ -7103,7 +6836,7 @@
             <a:prstDash val="solid"/>
           </a:ln>
           <a:effectLst>
-            <a:outerShdw sx="100000" sy="100000" kx="0" ky="0" algn="bl" rotWithShape="0" blurRad="101600" dist="25400" dir="8100000">
+            <a:outerShdw blurRad="101600" dist="25400" dir="8100000" algn="bl" rotWithShape="0">
               <a:srgbClr val="000000">
                 <a:alpha val="10000"/>
               </a:srgbClr>
@@ -7184,7 +6917,7 @@
           <a:bodyPr wrap="square" lIns="0" tIns="0" rIns="0" bIns="0" rtlCol="0" anchor="ctr"/>
           <a:lstStyle/>
           <a:p>
-            <a:pPr algn="ctr" indent="0" marL="0">
+            <a:pPr marL="0" indent="0" algn="ctr">
               <a:buNone/>
             </a:pPr>
             <a:r>
@@ -7220,7 +6953,7 @@
           <a:bodyPr wrap="square" rtlCol="0" anchor="ctr"/>
           <a:lstStyle/>
           <a:p>
-            <a:pPr indent="0" marL="0">
+            <a:pPr marL="0" indent="0">
               <a:buNone/>
             </a:pPr>
             <a:r>
@@ -7285,7 +7018,7 @@
           <a:bodyPr wrap="square" lIns="0" tIns="0" rIns="0" bIns="0" rtlCol="0" anchor="ctr"/>
           <a:lstStyle/>
           <a:p>
-            <a:pPr algn="ctr" indent="0" marL="0">
+            <a:pPr marL="0" indent="0" algn="ctr">
               <a:buNone/>
             </a:pPr>
             <a:r>
@@ -7321,7 +7054,7 @@
           <a:bodyPr wrap="square" rtlCol="0" anchor="ctr"/>
           <a:lstStyle/>
           <a:p>
-            <a:pPr indent="0" marL="0">
+            <a:pPr marL="0" indent="0">
               <a:buNone/>
             </a:pPr>
             <a:r>
@@ -7360,7 +7093,7 @@
             <a:prstDash val="solid"/>
           </a:ln>
           <a:effectLst>
-            <a:outerShdw sx="100000" sy="100000" kx="0" ky="0" algn="bl" rotWithShape="0" blurRad="101600" dist="25400" dir="8100000">
+            <a:outerShdw blurRad="101600" dist="25400" dir="8100000" algn="bl" rotWithShape="0">
               <a:srgbClr val="000000">
                 <a:alpha val="10000"/>
               </a:srgbClr>
@@ -7441,7 +7174,7 @@
           <a:bodyPr wrap="square" lIns="0" tIns="0" rIns="0" bIns="0" rtlCol="0" anchor="ctr"/>
           <a:lstStyle/>
           <a:p>
-            <a:pPr algn="ctr" indent="0" marL="0">
+            <a:pPr marL="0" indent="0" algn="ctr">
               <a:buNone/>
             </a:pPr>
             <a:r>
@@ -7477,7 +7210,7 @@
           <a:bodyPr wrap="square" rtlCol="0" anchor="ctr"/>
           <a:lstStyle/>
           <a:p>
-            <a:pPr indent="0" marL="0">
+            <a:pPr marL="0" indent="0">
               <a:buNone/>
             </a:pPr>
             <a:r>
@@ -7542,7 +7275,7 @@
           <a:bodyPr wrap="square" lIns="0" tIns="0" rIns="0" bIns="0" rtlCol="0" anchor="ctr"/>
           <a:lstStyle/>
           <a:p>
-            <a:pPr algn="ctr" indent="0" marL="0">
+            <a:pPr marL="0" indent="0" algn="ctr">
               <a:buNone/>
             </a:pPr>
             <a:r>
@@ -7578,7 +7311,7 @@
           <a:bodyPr wrap="square" rtlCol="0" anchor="ctr"/>
           <a:lstStyle/>
           <a:p>
-            <a:pPr indent="0" marL="0">
+            <a:pPr marL="0" indent="0">
               <a:buNone/>
             </a:pPr>
             <a:r>
@@ -7617,7 +7350,7 @@
             <a:prstDash val="solid"/>
           </a:ln>
           <a:effectLst>
-            <a:outerShdw sx="100000" sy="100000" kx="0" ky="0" algn="bl" rotWithShape="0" blurRad="101600" dist="25400" dir="8100000">
+            <a:outerShdw blurRad="101600" dist="25400" dir="8100000" algn="bl" rotWithShape="0">
               <a:srgbClr val="000000">
                 <a:alpha val="10000"/>
               </a:srgbClr>
@@ -7698,7 +7431,7 @@
           <a:bodyPr wrap="square" lIns="0" tIns="0" rIns="0" bIns="0" rtlCol="0" anchor="ctr"/>
           <a:lstStyle/>
           <a:p>
-            <a:pPr algn="ctr" indent="0" marL="0">
+            <a:pPr marL="0" indent="0" algn="ctr">
               <a:buNone/>
             </a:pPr>
             <a:r>
@@ -7734,7 +7467,7 @@
           <a:bodyPr wrap="square" rtlCol="0" anchor="ctr"/>
           <a:lstStyle/>
           <a:p>
-            <a:pPr indent="0" marL="0">
+            <a:pPr marL="0" indent="0">
               <a:buNone/>
             </a:pPr>
             <a:r>
@@ -7799,7 +7532,7 @@
           <a:bodyPr wrap="square" lIns="0" tIns="0" rIns="0" bIns="0" rtlCol="0" anchor="ctr"/>
           <a:lstStyle/>
           <a:p>
-            <a:pPr algn="ctr" indent="0" marL="0">
+            <a:pPr marL="0" indent="0" algn="ctr">
               <a:buNone/>
             </a:pPr>
             <a:r>
@@ -7835,7 +7568,7 @@
           <a:bodyPr wrap="square" rtlCol="0" anchor="ctr"/>
           <a:lstStyle/>
           <a:p>
-            <a:pPr indent="0" marL="0">
+            <a:pPr marL="0" indent="0">
               <a:buNone/>
             </a:pPr>
             <a:r>
@@ -7866,6 +7599,7 @@
         <a:solidFill>
           <a:srgbClr val="1A0A14"/>
         </a:solidFill>
+        <a:effectLst/>
       </p:bgPr>
     </p:bg>
     <p:spTree>
@@ -7928,7 +7662,7 @@
           <a:bodyPr wrap="square" rtlCol="0" anchor="ctr"/>
           <a:lstStyle/>
           <a:p>
-            <a:pPr indent="0" marL="0">
+            <a:pPr marL="0" indent="0">
               <a:buNone/>
             </a:pPr>
             <a:r>
@@ -7991,7 +7725,7 @@
           <a:bodyPr wrap="square" rtlCol="0" anchor="ctr"/>
           <a:lstStyle/>
           <a:p>
-            <a:pPr indent="0" marL="0">
+            <a:pPr marL="0" indent="0">
               <a:buNone/>
             </a:pPr>
             <a:r>
@@ -8027,7 +7761,7 @@
           <a:bodyPr wrap="square" rtlCol="0" anchor="ctr"/>
           <a:lstStyle/>
           <a:p>
-            <a:pPr indent="0" marL="0">
+            <a:pPr marL="0" indent="0">
               <a:buNone/>
             </a:pPr>
             <a:r>
@@ -8090,7 +7824,7 @@
           <a:bodyPr wrap="square" rtlCol="0" anchor="ctr"/>
           <a:lstStyle/>
           <a:p>
-            <a:pPr indent="0" marL="0">
+            <a:pPr marL="0" indent="0">
               <a:buNone/>
             </a:pPr>
             <a:r>
@@ -8126,7 +7860,7 @@
           <a:bodyPr wrap="square" rtlCol="0" anchor="ctr"/>
           <a:lstStyle/>
           <a:p>
-            <a:pPr indent="0" marL="0">
+            <a:pPr marL="0" indent="0">
               <a:buNone/>
             </a:pPr>
             <a:r>
@@ -8239,7 +7973,7 @@
           <a:bodyPr wrap="square" rtlCol="0" anchor="ctr"/>
           <a:lstStyle/>
           <a:p>
-            <a:pPr indent="0" marL="0">
+            <a:pPr marL="0" indent="0">
               <a:buNone/>
             </a:pPr>
             <a:r>
@@ -8275,7 +8009,7 @@
           <a:bodyPr wrap="square" rtlCol="0" anchor="ctr"/>
           <a:lstStyle/>
           <a:p>
-            <a:pPr indent="0" marL="0">
+            <a:pPr marL="0" indent="0">
               <a:buNone/>
             </a:pPr>
             <a:r>
@@ -8311,7 +8045,7 @@
           <a:bodyPr wrap="square" rtlCol="0" anchor="ctr"/>
           <a:lstStyle/>
           <a:p>
-            <a:pPr indent="0" marL="0">
+            <a:pPr marL="0" indent="0">
               <a:buNone/>
             </a:pPr>
             <a:r>
@@ -8347,7 +8081,7 @@
           <a:bodyPr wrap="square" rtlCol="0" anchor="ctr"/>
           <a:lstStyle/>
           <a:p>
-            <a:pPr indent="0" marL="0">
+            <a:pPr marL="0" indent="0">
               <a:buNone/>
             </a:pPr>
             <a:r>
@@ -8383,7 +8117,7 @@
           <a:bodyPr wrap="square" rtlCol="0" anchor="ctr"/>
           <a:lstStyle/>
           <a:p>
-            <a:pPr indent="0" marL="0">
+            <a:pPr marL="0" indent="0">
               <a:buNone/>
             </a:pPr>
             <a:r>
@@ -8471,7 +8205,7 @@
           <a:bodyPr wrap="square" rtlCol="0" anchor="ctr"/>
           <a:lstStyle/>
           <a:p>
-            <a:pPr indent="0" marL="0">
+            <a:pPr marL="0" indent="0">
               <a:buNone/>
             </a:pPr>
             <a:r>
@@ -8507,7 +8241,7 @@
           <a:bodyPr wrap="square" rtlCol="0" anchor="ctr"/>
           <a:lstStyle/>
           <a:p>
-            <a:pPr indent="0" marL="0">
+            <a:pPr marL="0" indent="0">
               <a:buNone/>
             </a:pPr>
             <a:r>
@@ -8543,7 +8277,7 @@
           <a:bodyPr wrap="square" rtlCol="0" anchor="ctr"/>
           <a:lstStyle/>
           <a:p>
-            <a:pPr indent="0" marL="0">
+            <a:pPr marL="0" indent="0">
               <a:buNone/>
             </a:pPr>
             <a:r>
@@ -8579,7 +8313,7 @@
           <a:bodyPr wrap="square" rtlCol="0" anchor="ctr"/>
           <a:lstStyle/>
           <a:p>
-            <a:pPr indent="0" marL="0">
+            <a:pPr marL="0" indent="0">
               <a:buNone/>
             </a:pPr>
             <a:r>
@@ -8615,7 +8349,7 @@
           <a:bodyPr wrap="square" rtlCol="0" anchor="ctr"/>
           <a:lstStyle/>
           <a:p>
-            <a:pPr indent="0" marL="0">
+            <a:pPr marL="0" indent="0">
               <a:buNone/>
             </a:pPr>
             <a:r>
@@ -8703,7 +8437,7 @@
           <a:bodyPr wrap="square" rtlCol="0" anchor="ctr"/>
           <a:lstStyle/>
           <a:p>
-            <a:pPr indent="0" marL="0">
+            <a:pPr marL="0" indent="0">
               <a:buNone/>
             </a:pPr>
             <a:r>
@@ -8739,7 +8473,7 @@
           <a:bodyPr wrap="square" rtlCol="0" anchor="ctr"/>
           <a:lstStyle/>
           <a:p>
-            <a:pPr indent="0" marL="0">
+            <a:pPr marL="0" indent="0">
               <a:buNone/>
             </a:pPr>
             <a:r>
@@ -8775,7 +8509,7 @@
           <a:bodyPr wrap="square" rtlCol="0" anchor="ctr"/>
           <a:lstStyle/>
           <a:p>
-            <a:pPr indent="0" marL="0">
+            <a:pPr marL="0" indent="0">
               <a:buNone/>
             </a:pPr>
             <a:r>
@@ -8811,7 +8545,7 @@
           <a:bodyPr wrap="square" rtlCol="0" anchor="ctr"/>
           <a:lstStyle/>
           <a:p>
-            <a:pPr indent="0" marL="0">
+            <a:pPr marL="0" indent="0">
               <a:buNone/>
             </a:pPr>
             <a:r>
@@ -8847,7 +8581,7 @@
           <a:bodyPr wrap="square" rtlCol="0" anchor="ctr"/>
           <a:lstStyle/>
           <a:p>
-            <a:pPr indent="0" marL="0">
+            <a:pPr marL="0" indent="0">
               <a:buNone/>
             </a:pPr>
             <a:r>
@@ -8910,7 +8644,7 @@
           <a:bodyPr wrap="square" rtlCol="0" anchor="ctr"/>
           <a:lstStyle/>
           <a:p>
-            <a:pPr algn="ctr" indent="0" marL="0">
+            <a:pPr marL="0" indent="0" algn="ctr">
               <a:buNone/>
             </a:pPr>
             <a:r>
@@ -8946,7 +8680,7 @@
           <a:bodyPr wrap="square" rtlCol="0" anchor="ctr"/>
           <a:lstStyle/>
           <a:p>
-            <a:pPr indent="0" marL="0">
+            <a:pPr marL="0" indent="0">
               <a:buNone/>
             </a:pPr>
             <a:r>
@@ -8977,6 +8711,7 @@
         <a:solidFill>
           <a:srgbClr val="F5EEF0"/>
         </a:solidFill>
+        <a:effectLst/>
       </p:bgPr>
     </p:bg>
     <p:spTree>
@@ -9039,7 +8774,7 @@
           <a:bodyPr wrap="square" rtlCol="0" anchor="ctr"/>
           <a:lstStyle/>
           <a:p>
-            <a:pPr indent="0" marL="0">
+            <a:pPr marL="0" indent="0">
               <a:buNone/>
             </a:pPr>
             <a:r>
@@ -9100,7 +8835,7 @@
           <a:bodyPr wrap="square" rtlCol="0" anchor="ctr"/>
           <a:lstStyle/>
           <a:p>
-            <a:pPr algn="ctr" indent="0" marL="0">
+            <a:pPr marL="0" indent="0" algn="ctr">
               <a:buNone/>
             </a:pPr>
             <a:r>
@@ -9139,7 +8874,7 @@
             <a:prstDash val="solid"/>
           </a:ln>
           <a:effectLst>
-            <a:outerShdw sx="100000" sy="100000" kx="0" ky="0" algn="bl" rotWithShape="0" blurRad="101600" dist="25400" dir="8100000">
+            <a:outerShdw blurRad="101600" dist="25400" dir="8100000" algn="bl" rotWithShape="0">
               <a:srgbClr val="000000">
                 <a:alpha val="10000"/>
               </a:srgbClr>
@@ -9193,7 +8928,7 @@
           <a:bodyPr wrap="square" rtlCol="0" anchor="ctr"/>
           <a:lstStyle/>
           <a:p>
-            <a:pPr indent="0" marL="0">
+            <a:pPr marL="0" indent="0">
               <a:buNone/>
             </a:pPr>
             <a:r>
@@ -9232,7 +8967,7 @@
           <a:bodyPr wrap="square" rtlCol="0" anchor="ctr"/>
           <a:lstStyle/>
           <a:p>
-            <a:pPr indent="0" marL="0">
+            <a:pPr marL="0" indent="0">
               <a:buNone/>
             </a:pPr>
             <a:r>
@@ -9268,7 +9003,7 @@
           <a:bodyPr wrap="square" rtlCol="0" anchor="ctr"/>
           <a:lstStyle/>
           <a:p>
-            <a:pPr indent="0" marL="0">
+            <a:pPr marL="0" indent="0">
               <a:buNone/>
             </a:pPr>
             <a:r>
@@ -9282,7 +9017,7 @@
             <a:endParaRPr lang="en-US" sz="1100" dirty="0"/>
           </a:p>
           <a:p>
-            <a:pPr indent="0" marL="0">
+            <a:pPr marL="0" indent="0">
               <a:buNone/>
             </a:pPr>
             <a:r>
@@ -9296,7 +9031,7 @@
             <a:endParaRPr lang="en-US" sz="1100" dirty="0"/>
           </a:p>
           <a:p>
-            <a:pPr indent="0" marL="0">
+            <a:pPr marL="0" indent="0">
               <a:buNone/>
             </a:pPr>
             <a:r>
@@ -9357,7 +9092,7 @@
           <a:bodyPr wrap="square" rtlCol="0" anchor="ctr"/>
           <a:lstStyle/>
           <a:p>
-            <a:pPr algn="ctr" indent="0" marL="0">
+            <a:pPr marL="0" indent="0" algn="ctr">
               <a:buNone/>
             </a:pPr>
             <a:r>
@@ -9396,7 +9131,7 @@
             <a:prstDash val="solid"/>
           </a:ln>
           <a:effectLst>
-            <a:outerShdw sx="100000" sy="100000" kx="0" ky="0" algn="bl" rotWithShape="0" blurRad="101600" dist="25400" dir="8100000">
+            <a:outerShdw blurRad="101600" dist="25400" dir="8100000" algn="bl" rotWithShape="0">
               <a:srgbClr val="000000">
                 <a:alpha val="10000"/>
               </a:srgbClr>
@@ -9450,7 +9185,7 @@
           <a:bodyPr wrap="square" rtlCol="0" anchor="ctr"/>
           <a:lstStyle/>
           <a:p>
-            <a:pPr indent="0" marL="0">
+            <a:pPr marL="0" indent="0">
               <a:buNone/>
             </a:pPr>
             <a:r>
@@ -9489,7 +9224,7 @@
           <a:bodyPr wrap="square" rtlCol="0" anchor="ctr"/>
           <a:lstStyle/>
           <a:p>
-            <a:pPr indent="0" marL="0">
+            <a:pPr marL="0" indent="0">
               <a:buNone/>
             </a:pPr>
             <a:r>
@@ -9525,7 +9260,7 @@
           <a:bodyPr wrap="square" rtlCol="0" anchor="ctr"/>
           <a:lstStyle/>
           <a:p>
-            <a:pPr indent="0" marL="0">
+            <a:pPr marL="0" indent="0">
               <a:buNone/>
             </a:pPr>
             <a:r>
@@ -9539,7 +9274,7 @@
             <a:endParaRPr lang="en-US" sz="1100" dirty="0"/>
           </a:p>
           <a:p>
-            <a:pPr indent="0" marL="0">
+            <a:pPr marL="0" indent="0">
               <a:buNone/>
             </a:pPr>
             <a:r>
@@ -9553,7 +9288,7 @@
             <a:endParaRPr lang="en-US" sz="1100" dirty="0"/>
           </a:p>
           <a:p>
-            <a:pPr indent="0" marL="0">
+            <a:pPr marL="0" indent="0">
               <a:buNone/>
             </a:pPr>
             <a:r>
@@ -9614,7 +9349,7 @@
           <a:bodyPr wrap="square" rtlCol="0" anchor="ctr"/>
           <a:lstStyle/>
           <a:p>
-            <a:pPr algn="ctr" indent="0" marL="0">
+            <a:pPr marL="0" indent="0" algn="ctr">
               <a:buNone/>
             </a:pPr>
             <a:r>
@@ -9653,7 +9388,7 @@
             <a:prstDash val="solid"/>
           </a:ln>
           <a:effectLst>
-            <a:outerShdw sx="100000" sy="100000" kx="0" ky="0" algn="bl" rotWithShape="0" blurRad="101600" dist="25400" dir="8100000">
+            <a:outerShdw blurRad="101600" dist="25400" dir="8100000" algn="bl" rotWithShape="0">
               <a:srgbClr val="000000">
                 <a:alpha val="10000"/>
               </a:srgbClr>
@@ -9707,7 +9442,7 @@
           <a:bodyPr wrap="square" rtlCol="0" anchor="ctr"/>
           <a:lstStyle/>
           <a:p>
-            <a:pPr indent="0" marL="0">
+            <a:pPr marL="0" indent="0">
               <a:buNone/>
             </a:pPr>
             <a:r>
@@ -9746,7 +9481,7 @@
           <a:bodyPr wrap="square" rtlCol="0" anchor="ctr"/>
           <a:lstStyle/>
           <a:p>
-            <a:pPr indent="0" marL="0">
+            <a:pPr marL="0" indent="0">
               <a:buNone/>
             </a:pPr>
             <a:r>
@@ -9782,7 +9517,7 @@
           <a:bodyPr wrap="square" rtlCol="0" anchor="ctr"/>
           <a:lstStyle/>
           <a:p>
-            <a:pPr indent="0" marL="0">
+            <a:pPr marL="0" indent="0">
               <a:buNone/>
             </a:pPr>
             <a:r>
@@ -9796,7 +9531,7 @@
             <a:endParaRPr lang="en-US" sz="1100" dirty="0"/>
           </a:p>
           <a:p>
-            <a:pPr indent="0" marL="0">
+            <a:pPr marL="0" indent="0">
               <a:buNone/>
             </a:pPr>
             <a:r>
@@ -9810,7 +9545,7 @@
             <a:endParaRPr lang="en-US" sz="1100" dirty="0"/>
           </a:p>
           <a:p>
-            <a:pPr indent="0" marL="0">
+            <a:pPr marL="0" indent="0">
               <a:buNone/>
             </a:pPr>
             <a:r>
@@ -9849,7 +9584,7 @@
             <a:prstDash val="solid"/>
           </a:ln>
           <a:effectLst>
-            <a:outerShdw sx="100000" sy="100000" kx="0" ky="0" algn="bl" rotWithShape="0" blurRad="101600" dist="25400" dir="8100000">
+            <a:outerShdw blurRad="101600" dist="25400" dir="8100000" algn="bl" rotWithShape="0">
               <a:srgbClr val="000000">
                 <a:alpha val="10000"/>
               </a:srgbClr>
@@ -9903,7 +9638,7 @@
           <a:bodyPr wrap="square" rtlCol="0" anchor="ctr"/>
           <a:lstStyle/>
           <a:p>
-            <a:pPr indent="0" marL="0">
+            <a:pPr marL="0" indent="0">
               <a:buNone/>
             </a:pPr>
             <a:r>
@@ -9942,7 +9677,7 @@
           <a:bodyPr wrap="square" rtlCol="0" anchor="ctr"/>
           <a:lstStyle/>
           <a:p>
-            <a:pPr indent="0" marL="0">
+            <a:pPr marL="0" indent="0">
               <a:buNone/>
             </a:pPr>
             <a:r>
@@ -9978,7 +9713,7 @@
           <a:bodyPr wrap="square" rtlCol="0" anchor="ctr"/>
           <a:lstStyle/>
           <a:p>
-            <a:pPr indent="0" marL="0">
+            <a:pPr marL="0" indent="0">
               <a:buNone/>
             </a:pPr>
             <a:r>
@@ -9992,7 +9727,7 @@
             <a:endParaRPr lang="en-US" sz="1100" dirty="0"/>
           </a:p>
           <a:p>
-            <a:pPr indent="0" marL="0">
+            <a:pPr marL="0" indent="0">
               <a:buNone/>
             </a:pPr>
             <a:r>
@@ -10006,7 +9741,7 @@
             <a:endParaRPr lang="en-US" sz="1100" dirty="0"/>
           </a:p>
           <a:p>
-            <a:pPr indent="0" marL="0">
+            <a:pPr marL="0" indent="0">
               <a:buNone/>
             </a:pPr>
             <a:r>
@@ -10067,7 +9802,7 @@
           <a:bodyPr wrap="square" rtlCol="0" anchor="ctr"/>
           <a:lstStyle/>
           <a:p>
-            <a:pPr indent="0" marL="0">
+            <a:pPr marL="0" indent="0">
               <a:buNone/>
             </a:pPr>
             <a:r>
@@ -10078,9 +9813,6 @@
               </a:rPr>
               <a:t>Outil clé : </a:t>
             </a:r>
-            <a:pPr indent="0" marL="0">
-              <a:buNone/>
-            </a:pPr>
             <a:r>
               <a:rPr lang="en-US" sz="1100" dirty="0">
                 <a:solidFill>
@@ -10109,6 +9841,7 @@
         <a:solidFill>
           <a:srgbClr val="F5EEF0"/>
         </a:solidFill>
+        <a:effectLst/>
       </p:bgPr>
     </p:bg>
     <p:spTree>
@@ -10171,7 +9904,7 @@
           <a:bodyPr wrap="square" rtlCol="0" anchor="ctr"/>
           <a:lstStyle/>
           <a:p>
-            <a:pPr indent="0" marL="0">
+            <a:pPr marL="0" indent="0">
               <a:buNone/>
             </a:pPr>
             <a:r>
@@ -10207,7 +9940,7 @@
           <a:bodyPr wrap="square" rtlCol="0" anchor="ctr"/>
           <a:lstStyle/>
           <a:p>
-            <a:pPr indent="0" marL="0">
+            <a:pPr marL="0" indent="0">
               <a:buNone/>
             </a:pPr>
             <a:r>
@@ -10246,7 +9979,7 @@
             <a:prstDash val="solid"/>
           </a:ln>
           <a:effectLst>
-            <a:outerShdw sx="100000" sy="100000" kx="0" ky="0" algn="bl" rotWithShape="0" blurRad="101600" dist="25400" dir="8100000">
+            <a:outerShdw blurRad="101600" dist="25400" dir="8100000" algn="bl" rotWithShape="0">
               <a:srgbClr val="000000">
                 <a:alpha val="10000"/>
               </a:srgbClr>
@@ -10300,7 +10033,7 @@
           <a:bodyPr wrap="square" rtlCol="0" anchor="ctr"/>
           <a:lstStyle/>
           <a:p>
-            <a:pPr indent="0" marL="0">
+            <a:pPr marL="0" indent="0">
               <a:buNone/>
             </a:pPr>
             <a:r>
@@ -10336,7 +10069,7 @@
           <a:bodyPr wrap="square" rtlCol="0" anchor="ctr"/>
           <a:lstStyle/>
           <a:p>
-            <a:pPr indent="0" marL="0">
+            <a:pPr marL="0" indent="0">
               <a:buNone/>
             </a:pPr>
             <a:r>
@@ -10375,7 +10108,7 @@
             <a:prstDash val="solid"/>
           </a:ln>
           <a:effectLst>
-            <a:outerShdw sx="100000" sy="100000" kx="0" ky="0" algn="bl" rotWithShape="0" blurRad="101600" dist="25400" dir="8100000">
+            <a:outerShdw blurRad="101600" dist="25400" dir="8100000" algn="bl" rotWithShape="0">
               <a:srgbClr val="000000">
                 <a:alpha val="10000"/>
               </a:srgbClr>
@@ -10429,7 +10162,7 @@
           <a:bodyPr wrap="square" rtlCol="0" anchor="ctr"/>
           <a:lstStyle/>
           <a:p>
-            <a:pPr indent="0" marL="0">
+            <a:pPr marL="0" indent="0">
               <a:buNone/>
             </a:pPr>
             <a:r>
@@ -10465,7 +10198,7 @@
           <a:bodyPr wrap="square" rtlCol="0" anchor="ctr"/>
           <a:lstStyle/>
           <a:p>
-            <a:pPr indent="0" marL="0">
+            <a:pPr marL="0" indent="0">
               <a:buNone/>
             </a:pPr>
             <a:r>
@@ -10504,7 +10237,7 @@
             <a:prstDash val="solid"/>
           </a:ln>
           <a:effectLst>
-            <a:outerShdw sx="100000" sy="100000" kx="0" ky="0" algn="bl" rotWithShape="0" blurRad="101600" dist="25400" dir="8100000">
+            <a:outerShdw blurRad="101600" dist="25400" dir="8100000" algn="bl" rotWithShape="0">
               <a:srgbClr val="000000">
                 <a:alpha val="10000"/>
               </a:srgbClr>
@@ -10558,7 +10291,7 @@
           <a:bodyPr wrap="square" rtlCol="0" anchor="ctr"/>
           <a:lstStyle/>
           <a:p>
-            <a:pPr indent="0" marL="0">
+            <a:pPr marL="0" indent="0">
               <a:buNone/>
             </a:pPr>
             <a:r>
@@ -10594,7 +10327,7 @@
           <a:bodyPr wrap="square" rtlCol="0" anchor="ctr"/>
           <a:lstStyle/>
           <a:p>
-            <a:pPr indent="0" marL="0">
+            <a:pPr marL="0" indent="0">
               <a:buNone/>
             </a:pPr>
             <a:r>
@@ -10633,7 +10366,7 @@
             <a:prstDash val="solid"/>
           </a:ln>
           <a:effectLst>
-            <a:outerShdw sx="100000" sy="100000" kx="0" ky="0" algn="bl" rotWithShape="0" blurRad="101600" dist="25400" dir="8100000">
+            <a:outerShdw blurRad="101600" dist="25400" dir="8100000" algn="bl" rotWithShape="0">
               <a:srgbClr val="000000">
                 <a:alpha val="10000"/>
               </a:srgbClr>
@@ -10687,7 +10420,7 @@
           <a:bodyPr wrap="square" rtlCol="0" anchor="ctr"/>
           <a:lstStyle/>
           <a:p>
-            <a:pPr indent="0" marL="0">
+            <a:pPr marL="0" indent="0">
               <a:buNone/>
             </a:pPr>
             <a:r>
@@ -10723,7 +10456,7 @@
           <a:bodyPr wrap="square" rtlCol="0" anchor="ctr"/>
           <a:lstStyle/>
           <a:p>
-            <a:pPr indent="0" marL="0">
+            <a:pPr marL="0" indent="0">
               <a:buNone/>
             </a:pPr>
             <a:r>
@@ -10759,7 +10492,7 @@
           <a:bodyPr wrap="square" rtlCol="0" anchor="ctr"/>
           <a:lstStyle/>
           <a:p>
-            <a:pPr indent="0" marL="0">
+            <a:pPr marL="0" indent="0">
               <a:buNone/>
             </a:pPr>
             <a:r>
@@ -10798,7 +10531,7 @@
             <a:prstDash val="solid"/>
           </a:ln>
           <a:effectLst>
-            <a:outerShdw sx="100000" sy="100000" kx="0" ky="0" algn="bl" rotWithShape="0" blurRad="101600" dist="25400" dir="8100000">
+            <a:outerShdw blurRad="101600" dist="25400" dir="8100000" algn="bl" rotWithShape="0">
               <a:srgbClr val="000000">
                 <a:alpha val="10000"/>
               </a:srgbClr>
@@ -10852,7 +10585,7 @@
           <a:bodyPr wrap="square" rtlCol="0" anchor="ctr"/>
           <a:lstStyle/>
           <a:p>
-            <a:pPr indent="0" marL="0">
+            <a:pPr marL="0" indent="0">
               <a:buNone/>
             </a:pPr>
             <a:r>
@@ -10888,7 +10621,7 @@
           <a:bodyPr wrap="square" rtlCol="0" anchor="ctr"/>
           <a:lstStyle/>
           <a:p>
-            <a:pPr indent="0" marL="0">
+            <a:pPr marL="0" indent="0">
               <a:buNone/>
             </a:pPr>
             <a:r>
@@ -10927,7 +10660,7 @@
             <a:prstDash val="solid"/>
           </a:ln>
           <a:effectLst>
-            <a:outerShdw sx="100000" sy="100000" kx="0" ky="0" algn="bl" rotWithShape="0" blurRad="101600" dist="25400" dir="8100000">
+            <a:outerShdw blurRad="101600" dist="25400" dir="8100000" algn="bl" rotWithShape="0">
               <a:srgbClr val="000000">
                 <a:alpha val="10000"/>
               </a:srgbClr>
@@ -10981,7 +10714,7 @@
           <a:bodyPr wrap="square" rtlCol="0" anchor="ctr"/>
           <a:lstStyle/>
           <a:p>
-            <a:pPr indent="0" marL="0">
+            <a:pPr marL="0" indent="0">
               <a:buNone/>
             </a:pPr>
             <a:r>
@@ -11017,7 +10750,7 @@
           <a:bodyPr wrap="square" rtlCol="0" anchor="ctr"/>
           <a:lstStyle/>
           <a:p>
-            <a:pPr indent="0" marL="0">
+            <a:pPr marL="0" indent="0">
               <a:buNone/>
             </a:pPr>
             <a:r>
@@ -11056,7 +10789,7 @@
             <a:prstDash val="solid"/>
           </a:ln>
           <a:effectLst>
-            <a:outerShdw sx="100000" sy="100000" kx="0" ky="0" algn="bl" rotWithShape="0" blurRad="101600" dist="25400" dir="8100000">
+            <a:outerShdw blurRad="101600" dist="25400" dir="8100000" algn="bl" rotWithShape="0">
               <a:srgbClr val="000000">
                 <a:alpha val="10000"/>
               </a:srgbClr>
@@ -11110,7 +10843,7 @@
           <a:bodyPr wrap="square" rtlCol="0" anchor="ctr"/>
           <a:lstStyle/>
           <a:p>
-            <a:pPr indent="0" marL="0">
+            <a:pPr marL="0" indent="0">
               <a:buNone/>
             </a:pPr>
             <a:r>
@@ -11146,7 +10879,7 @@
           <a:bodyPr wrap="square" rtlCol="0" anchor="ctr"/>
           <a:lstStyle/>
           <a:p>
-            <a:pPr indent="0" marL="0">
+            <a:pPr marL="0" indent="0">
               <a:buNone/>
             </a:pPr>
             <a:r>
@@ -11182,7 +10915,7 @@
           <a:bodyPr wrap="square" rtlCol="0" anchor="ctr"/>
           <a:lstStyle/>
           <a:p>
-            <a:pPr indent="0" marL="0">
+            <a:pPr marL="0" indent="0">
               <a:buNone/>
             </a:pPr>
             <a:r>
@@ -11247,7 +10980,7 @@
           <a:bodyPr wrap="square" lIns="0" tIns="0" rIns="0" bIns="0" rtlCol="0" anchor="ctr"/>
           <a:lstStyle/>
           <a:p>
-            <a:pPr algn="ctr" indent="0" marL="0">
+            <a:pPr marL="0" indent="0" algn="ctr">
               <a:buNone/>
             </a:pPr>
             <a:r>
@@ -11312,7 +11045,7 @@
           <a:bodyPr wrap="square" lIns="0" tIns="0" rIns="0" bIns="0" rtlCol="0" anchor="ctr"/>
           <a:lstStyle/>
           <a:p>
-            <a:pPr algn="ctr" indent="0" marL="0">
+            <a:pPr marL="0" indent="0" algn="ctr">
               <a:buNone/>
             </a:pPr>
             <a:r>
@@ -11377,7 +11110,7 @@
           <a:bodyPr wrap="square" lIns="0" tIns="0" rIns="0" bIns="0" rtlCol="0" anchor="ctr"/>
           <a:lstStyle/>
           <a:p>
-            <a:pPr algn="ctr" indent="0" marL="0">
+            <a:pPr marL="0" indent="0" algn="ctr">
               <a:buNone/>
             </a:pPr>
             <a:r>
@@ -11442,7 +11175,7 @@
           <a:bodyPr wrap="square" lIns="0" tIns="0" rIns="0" bIns="0" rtlCol="0" anchor="ctr"/>
           <a:lstStyle/>
           <a:p>
-            <a:pPr algn="ctr" indent="0" marL="0">
+            <a:pPr marL="0" indent="0" algn="ctr">
               <a:buNone/>
             </a:pPr>
             <a:r>
@@ -11465,20 +11198,20 @@
         </p:nvSpPr>
         <p:spPr>
           <a:xfrm>
-            <a:off x="365760" y="4114800"/>
-            <a:ext cx="1371600" cy="256032"/>
-          </a:xfrm>
-          <a:prstGeom prst="rect">
-            <a:avLst/>
-          </a:prstGeom>
-          <a:noFill/>
-          <a:ln/>
-        </p:spPr>
-        <p:txBody>
-          <a:bodyPr wrap="square" rtlCol="0" anchor="ctr"/>
-          <a:lstStyle/>
-          <a:p>
-            <a:pPr indent="0" marL="0">
+            <a:off x="264160" y="4494107"/>
+            <a:ext cx="852763" cy="256032"/>
+          </a:xfrm>
+          <a:prstGeom prst="rect">
+            <a:avLst/>
+          </a:prstGeom>
+          <a:noFill/>
+          <a:ln/>
+        </p:spPr>
+        <p:txBody>
+          <a:bodyPr wrap="square" rtlCol="0" anchor="ctr"/>
+          <a:lstStyle/>
+          <a:p>
+            <a:pPr marL="0" indent="0">
               <a:buNone/>
             </a:pPr>
             <a:r>
@@ -11501,7 +11234,7 @@
         </p:nvSpPr>
         <p:spPr>
           <a:xfrm>
-            <a:off x="1691640" y="4114800"/>
+            <a:off x="1542627" y="4434840"/>
             <a:ext cx="1307592" cy="256032"/>
           </a:xfrm>
           <a:prstGeom prst="roundRect">
@@ -11528,8 +11261,8 @@
         </p:nvSpPr>
         <p:spPr>
           <a:xfrm>
-            <a:off x="1691640" y="4114800"/>
-            <a:ext cx="1307592" cy="256032"/>
+            <a:off x="1598507" y="4434840"/>
+            <a:ext cx="1076960" cy="256032"/>
           </a:xfrm>
           <a:prstGeom prst="rect">
             <a:avLst/>
@@ -11541,7 +11274,7 @@
           <a:bodyPr wrap="square" lIns="0" tIns="0" rIns="0" bIns="0" rtlCol="0" anchor="ctr"/>
           <a:lstStyle/>
           <a:p>
-            <a:pPr algn="ctr" indent="0" marL="0">
+            <a:pPr marL="0" indent="0" algn="ctr">
               <a:buNone/>
             </a:pPr>
             <a:r>
@@ -11564,7 +11297,7 @@
         </p:nvSpPr>
         <p:spPr>
           <a:xfrm>
-            <a:off x="3090672" y="4114800"/>
+            <a:off x="2990088" y="4436872"/>
             <a:ext cx="1636776" cy="256032"/>
           </a:xfrm>
           <a:prstGeom prst="roundRect">
@@ -11591,8 +11324,8 @@
         </p:nvSpPr>
         <p:spPr>
           <a:xfrm>
-            <a:off x="3090672" y="4114800"/>
-            <a:ext cx="1636776" cy="256032"/>
+            <a:off x="3043259" y="4427728"/>
+            <a:ext cx="1426464" cy="256032"/>
           </a:xfrm>
           <a:prstGeom prst="rect">
             <a:avLst/>
@@ -11604,7 +11337,7 @@
           <a:bodyPr wrap="square" lIns="0" tIns="0" rIns="0" bIns="0" rtlCol="0" anchor="ctr"/>
           <a:lstStyle/>
           <a:p>
-            <a:pPr algn="ctr" indent="0" marL="0">
+            <a:pPr marL="0" indent="0" algn="ctr">
               <a:buNone/>
             </a:pPr>
             <a:r>
@@ -11627,7 +11360,7 @@
         </p:nvSpPr>
         <p:spPr>
           <a:xfrm>
-            <a:off x="4818888" y="4114800"/>
+            <a:off x="4818888" y="4425696"/>
             <a:ext cx="1801368" cy="256032"/>
           </a:xfrm>
           <a:prstGeom prst="roundRect">
@@ -11654,8 +11387,8 @@
         </p:nvSpPr>
         <p:spPr>
           <a:xfrm>
-            <a:off x="4818888" y="4114800"/>
-            <a:ext cx="1801368" cy="256032"/>
+            <a:off x="5093208" y="4425696"/>
+            <a:ext cx="1252727" cy="256032"/>
           </a:xfrm>
           <a:prstGeom prst="rect">
             <a:avLst/>
@@ -11667,7 +11400,7 @@
           <a:bodyPr wrap="square" lIns="0" tIns="0" rIns="0" bIns="0" rtlCol="0" anchor="ctr"/>
           <a:lstStyle/>
           <a:p>
-            <a:pPr algn="ctr" indent="0" marL="0">
+            <a:pPr marL="0" indent="0" algn="ctr">
               <a:buNone/>
             </a:pPr>
             <a:r>
@@ -11690,7 +11423,7 @@
         </p:nvSpPr>
         <p:spPr>
           <a:xfrm>
-            <a:off x="6711696" y="4114800"/>
+            <a:off x="6869853" y="4436872"/>
             <a:ext cx="731520" cy="256032"/>
           </a:xfrm>
           <a:prstGeom prst="roundRect">
@@ -11717,7 +11450,7 @@
         </p:nvSpPr>
         <p:spPr>
           <a:xfrm>
-            <a:off x="6711696" y="4114800"/>
+            <a:off x="6869853" y="4425696"/>
             <a:ext cx="731520" cy="256032"/>
           </a:xfrm>
           <a:prstGeom prst="rect">
@@ -11730,7 +11463,7 @@
           <a:bodyPr wrap="square" lIns="0" tIns="0" rIns="0" bIns="0" rtlCol="0" anchor="ctr"/>
           <a:lstStyle/>
           <a:p>
-            <a:pPr algn="ctr" indent="0" marL="0">
+            <a:pPr marL="0" indent="0" algn="ctr">
               <a:buNone/>
             </a:pPr>
             <a:r>
@@ -11761,6 +11494,7 @@
         <a:solidFill>
           <a:srgbClr val="F5EEF0"/>
         </a:solidFill>
+        <a:effectLst/>
       </p:bgPr>
     </p:bg>
     <p:spTree>
@@ -11823,7 +11557,7 @@
           <a:bodyPr wrap="square" rtlCol="0" anchor="ctr"/>
           <a:lstStyle/>
           <a:p>
-            <a:pPr indent="0" marL="0">
+            <a:pPr marL="0" indent="0">
               <a:buNone/>
             </a:pPr>
             <a:r>
@@ -11862,7 +11596,7 @@
             <a:prstDash val="solid"/>
           </a:ln>
           <a:effectLst>
-            <a:outerShdw sx="100000" sy="100000" kx="0" ky="0" algn="bl" rotWithShape="0" blurRad="101600" dist="25400" dir="8100000">
+            <a:outerShdw blurRad="101600" dist="25400" dir="8100000" algn="bl" rotWithShape="0">
               <a:srgbClr val="000000">
                 <a:alpha val="10000"/>
               </a:srgbClr>
@@ -11916,7 +11650,7 @@
           <a:bodyPr wrap="square" rtlCol="0" anchor="ctr"/>
           <a:lstStyle/>
           <a:p>
-            <a:pPr algn="ctr" indent="0" marL="0">
+            <a:pPr marL="0" indent="0" algn="ctr">
               <a:buNone/>
             </a:pPr>
             <a:r>
@@ -11952,7 +11686,7 @@
           <a:bodyPr wrap="square" rtlCol="0" anchor="ctr"/>
           <a:lstStyle/>
           <a:p>
-            <a:pPr algn="ctr" indent="0" marL="0">
+            <a:pPr marL="0" indent="0" algn="ctr">
               <a:buNone/>
             </a:pPr>
             <a:r>
@@ -12015,7 +11749,7 @@
           <a:bodyPr wrap="square" rtlCol="0" anchor="ctr"/>
           <a:lstStyle/>
           <a:p>
-            <a:pPr indent="0" marL="0">
+            <a:pPr marL="0" indent="0">
               <a:buNone/>
             </a:pPr>
             <a:r>
@@ -12078,7 +11812,7 @@
           <a:bodyPr wrap="square" rtlCol="0" anchor="ctr"/>
           <a:lstStyle/>
           <a:p>
-            <a:pPr indent="0" marL="0">
+            <a:pPr marL="0" indent="0">
               <a:buNone/>
             </a:pPr>
             <a:r>
@@ -12141,7 +11875,7 @@
           <a:bodyPr wrap="square" rtlCol="0" anchor="ctr"/>
           <a:lstStyle/>
           <a:p>
-            <a:pPr indent="0" marL="0">
+            <a:pPr marL="0" indent="0">
               <a:buNone/>
             </a:pPr>
             <a:r>
@@ -12204,7 +11938,7 @@
           <a:bodyPr wrap="square" rtlCol="0" anchor="ctr"/>
           <a:lstStyle/>
           <a:p>
-            <a:pPr indent="0" marL="0">
+            <a:pPr marL="0" indent="0">
               <a:buNone/>
             </a:pPr>
             <a:r>
@@ -12290,7 +12024,7 @@
           <a:bodyPr wrap="square" rtlCol="0" anchor="ctr"/>
           <a:lstStyle/>
           <a:p>
-            <a:pPr algn="ctr" indent="0" marL="0">
+            <a:pPr marL="0" indent="0" algn="ctr">
               <a:buNone/>
             </a:pPr>
             <a:r>
@@ -12329,7 +12063,7 @@
             <a:prstDash val="solid"/>
           </a:ln>
           <a:effectLst>
-            <a:outerShdw sx="100000" sy="100000" kx="0" ky="0" algn="bl" rotWithShape="0" blurRad="101600" dist="25400" dir="8100000">
+            <a:outerShdw blurRad="101600" dist="25400" dir="8100000" algn="bl" rotWithShape="0">
               <a:srgbClr val="000000">
                 <a:alpha val="10000"/>
               </a:srgbClr>
@@ -12383,7 +12117,7 @@
           <a:bodyPr wrap="square" rtlCol="0" anchor="ctr"/>
           <a:lstStyle/>
           <a:p>
-            <a:pPr algn="ctr" indent="0" marL="0">
+            <a:pPr marL="0" indent="0" algn="ctr">
               <a:buNone/>
             </a:pPr>
             <a:r>
@@ -12419,7 +12153,7 @@
           <a:bodyPr wrap="square" rtlCol="0" anchor="ctr"/>
           <a:lstStyle/>
           <a:p>
-            <a:pPr algn="ctr" indent="0" marL="0">
+            <a:pPr marL="0" indent="0" algn="ctr">
               <a:buNone/>
             </a:pPr>
             <a:r>
@@ -12482,7 +12216,7 @@
           <a:bodyPr wrap="square" rtlCol="0" anchor="ctr"/>
           <a:lstStyle/>
           <a:p>
-            <a:pPr indent="0" marL="0">
+            <a:pPr marL="0" indent="0">
               <a:buNone/>
             </a:pPr>
             <a:r>
@@ -12545,7 +12279,7 @@
           <a:bodyPr wrap="square" rtlCol="0" anchor="ctr"/>
           <a:lstStyle/>
           <a:p>
-            <a:pPr indent="0" marL="0">
+            <a:pPr marL="0" indent="0">
               <a:buNone/>
             </a:pPr>
             <a:r>
@@ -12608,7 +12342,7 @@
           <a:bodyPr wrap="square" rtlCol="0" anchor="ctr"/>
           <a:lstStyle/>
           <a:p>
-            <a:pPr indent="0" marL="0">
+            <a:pPr marL="0" indent="0">
               <a:buNone/>
             </a:pPr>
             <a:r>
@@ -12671,7 +12405,7 @@
           <a:bodyPr wrap="square" rtlCol="0" anchor="ctr"/>
           <a:lstStyle/>
           <a:p>
-            <a:pPr indent="0" marL="0">
+            <a:pPr marL="0" indent="0">
               <a:buNone/>
             </a:pPr>
             <a:r>
@@ -12732,7 +12466,7 @@
           <a:bodyPr wrap="square" rtlCol="0" anchor="ctr"/>
           <a:lstStyle/>
           <a:p>
-            <a:pPr algn="ctr" indent="0" marL="0">
+            <a:pPr marL="0" indent="0" algn="ctr">
               <a:buNone/>
             </a:pPr>
             <a:r>
@@ -12771,7 +12505,7 @@
             <a:prstDash val="solid"/>
           </a:ln>
           <a:effectLst>
-            <a:outerShdw sx="100000" sy="100000" kx="0" ky="0" algn="bl" rotWithShape="0" blurRad="101600" dist="25400" dir="8100000">
+            <a:outerShdw blurRad="101600" dist="25400" dir="8100000" algn="bl" rotWithShape="0">
               <a:srgbClr val="000000">
                 <a:alpha val="10000"/>
               </a:srgbClr>
@@ -12825,7 +12559,7 @@
           <a:bodyPr wrap="square" rtlCol="0" anchor="ctr"/>
           <a:lstStyle/>
           <a:p>
-            <a:pPr algn="ctr" indent="0" marL="0">
+            <a:pPr marL="0" indent="0" algn="ctr">
               <a:buNone/>
             </a:pPr>
             <a:r>
@@ -12861,7 +12595,7 @@
           <a:bodyPr wrap="square" rtlCol="0" anchor="ctr"/>
           <a:lstStyle/>
           <a:p>
-            <a:pPr algn="ctr" indent="0" marL="0">
+            <a:pPr marL="0" indent="0" algn="ctr">
               <a:buNone/>
             </a:pPr>
             <a:r>
@@ -12924,7 +12658,7 @@
           <a:bodyPr wrap="square" rtlCol="0" anchor="ctr"/>
           <a:lstStyle/>
           <a:p>
-            <a:pPr indent="0" marL="0">
+            <a:pPr marL="0" indent="0">
               <a:buNone/>
             </a:pPr>
             <a:r>
@@ -12987,7 +12721,7 @@
           <a:bodyPr wrap="square" rtlCol="0" anchor="ctr"/>
           <a:lstStyle/>
           <a:p>
-            <a:pPr indent="0" marL="0">
+            <a:pPr marL="0" indent="0">
               <a:buNone/>
             </a:pPr>
             <a:r>
@@ -13050,7 +12784,7 @@
           <a:bodyPr wrap="square" rtlCol="0" anchor="ctr"/>
           <a:lstStyle/>
           <a:p>
-            <a:pPr indent="0" marL="0">
+            <a:pPr marL="0" indent="0">
               <a:buNone/>
             </a:pPr>
             <a:r>
@@ -13113,7 +12847,7 @@
           <a:bodyPr wrap="square" rtlCol="0" anchor="ctr"/>
           <a:lstStyle/>
           <a:p>
-            <a:pPr indent="0" marL="0">
+            <a:pPr marL="0" indent="0">
               <a:buNone/>
             </a:pPr>
             <a:r>
@@ -13174,7 +12908,7 @@
           <a:bodyPr wrap="square" rtlCol="0" anchor="ctr"/>
           <a:lstStyle/>
           <a:p>
-            <a:pPr algn="ctr" indent="0" marL="0">
+            <a:pPr marL="0" indent="0" algn="ctr">
               <a:buNone/>
             </a:pPr>
             <a:r>
@@ -13213,7 +12947,7 @@
             <a:prstDash val="solid"/>
           </a:ln>
           <a:effectLst>
-            <a:outerShdw sx="100000" sy="100000" kx="0" ky="0" algn="bl" rotWithShape="0" blurRad="101600" dist="25400" dir="8100000">
+            <a:outerShdw blurRad="101600" dist="25400" dir="8100000" algn="bl" rotWithShape="0">
               <a:srgbClr val="000000">
                 <a:alpha val="10000"/>
               </a:srgbClr>
@@ -13267,7 +13001,7 @@
           <a:bodyPr wrap="square" rtlCol="0" anchor="ctr"/>
           <a:lstStyle/>
           <a:p>
-            <a:pPr algn="ctr" indent="0" marL="0">
+            <a:pPr marL="0" indent="0" algn="ctr">
               <a:buNone/>
             </a:pPr>
             <a:r>
@@ -13303,7 +13037,7 @@
           <a:bodyPr wrap="square" rtlCol="0" anchor="ctr"/>
           <a:lstStyle/>
           <a:p>
-            <a:pPr algn="ctr" indent="0" marL="0">
+            <a:pPr marL="0" indent="0" algn="ctr">
               <a:buNone/>
             </a:pPr>
             <a:r>
@@ -13366,7 +13100,7 @@
           <a:bodyPr wrap="square" rtlCol="0" anchor="ctr"/>
           <a:lstStyle/>
           <a:p>
-            <a:pPr indent="0" marL="0">
+            <a:pPr marL="0" indent="0">
               <a:buNone/>
             </a:pPr>
             <a:r>
@@ -13429,7 +13163,7 @@
           <a:bodyPr wrap="square" rtlCol="0" anchor="ctr"/>
           <a:lstStyle/>
           <a:p>
-            <a:pPr indent="0" marL="0">
+            <a:pPr marL="0" indent="0">
               <a:buNone/>
             </a:pPr>
             <a:r>
@@ -13492,7 +13226,7 @@
           <a:bodyPr wrap="square" rtlCol="0" anchor="ctr"/>
           <a:lstStyle/>
           <a:p>
-            <a:pPr indent="0" marL="0">
+            <a:pPr marL="0" indent="0">
               <a:buNone/>
             </a:pPr>
             <a:r>
@@ -13555,7 +13289,7 @@
           <a:bodyPr wrap="square" rtlCol="0" anchor="ctr"/>
           <a:lstStyle/>
           <a:p>
-            <a:pPr indent="0" marL="0">
+            <a:pPr marL="0" indent="0">
               <a:buNone/>
             </a:pPr>
             <a:r>
@@ -13616,7 +13350,7 @@
           <a:bodyPr wrap="square" rtlCol="0" anchor="ctr"/>
           <a:lstStyle/>
           <a:p>
-            <a:pPr algn="ctr" indent="0" marL="0">
+            <a:pPr marL="0" indent="0" algn="ctr">
               <a:buNone/>
             </a:pPr>
             <a:r>
@@ -13655,7 +13389,7 @@
             <a:prstDash val="solid"/>
           </a:ln>
           <a:effectLst>
-            <a:outerShdw sx="100000" sy="100000" kx="0" ky="0" algn="bl" rotWithShape="0" blurRad="101600" dist="25400" dir="8100000">
+            <a:outerShdw blurRad="101600" dist="25400" dir="8100000" algn="bl" rotWithShape="0">
               <a:srgbClr val="000000">
                 <a:alpha val="10000"/>
               </a:srgbClr>
@@ -13709,7 +13443,7 @@
           <a:bodyPr wrap="square" rtlCol="0" anchor="ctr"/>
           <a:lstStyle/>
           <a:p>
-            <a:pPr algn="ctr" indent="0" marL="0">
+            <a:pPr marL="0" indent="0" algn="ctr">
               <a:buNone/>
             </a:pPr>
             <a:r>
@@ -13745,7 +13479,7 @@
           <a:bodyPr wrap="square" rtlCol="0" anchor="ctr"/>
           <a:lstStyle/>
           <a:p>
-            <a:pPr algn="ctr" indent="0" marL="0">
+            <a:pPr marL="0" indent="0" algn="ctr">
               <a:buNone/>
             </a:pPr>
             <a:r>
@@ -13808,7 +13542,7 @@
           <a:bodyPr wrap="square" rtlCol="0" anchor="ctr"/>
           <a:lstStyle/>
           <a:p>
-            <a:pPr indent="0" marL="0">
+            <a:pPr marL="0" indent="0">
               <a:buNone/>
             </a:pPr>
             <a:r>
@@ -13871,7 +13605,7 @@
           <a:bodyPr wrap="square" rtlCol="0" anchor="ctr"/>
           <a:lstStyle/>
           <a:p>
-            <a:pPr indent="0" marL="0">
+            <a:pPr marL="0" indent="0">
               <a:buNone/>
             </a:pPr>
             <a:r>
@@ -13934,7 +13668,7 @@
           <a:bodyPr wrap="square" rtlCol="0" anchor="ctr"/>
           <a:lstStyle/>
           <a:p>
-            <a:pPr indent="0" marL="0">
+            <a:pPr marL="0" indent="0">
               <a:buNone/>
             </a:pPr>
             <a:r>
@@ -13997,7 +13731,7 @@
           <a:bodyPr wrap="square" rtlCol="0" anchor="ctr"/>
           <a:lstStyle/>
           <a:p>
-            <a:pPr indent="0" marL="0">
+            <a:pPr marL="0" indent="0">
               <a:buNone/>
             </a:pPr>
             <a:r>
@@ -14058,7 +13792,7 @@
           <a:bodyPr wrap="square" rtlCol="0" anchor="ctr"/>
           <a:lstStyle/>
           <a:p>
-            <a:pPr algn="ctr" indent="0" marL="0">
+            <a:pPr marL="0" indent="0" algn="ctr">
               <a:buNone/>
             </a:pPr>
             <a:r>
@@ -14089,6 +13823,7 @@
         <a:solidFill>
           <a:srgbClr val="F5EEF0"/>
         </a:solidFill>
+        <a:effectLst/>
       </p:bgPr>
     </p:bg>
     <p:spTree>
@@ -14151,7 +13886,7 @@
           <a:bodyPr wrap="square" rtlCol="0" anchor="ctr"/>
           <a:lstStyle/>
           <a:p>
-            <a:pPr indent="0" marL="0">
+            <a:pPr marL="0" indent="0">
               <a:buNone/>
             </a:pPr>
             <a:r>
@@ -14187,7 +13922,7 @@
           <a:bodyPr wrap="square" rtlCol="0" anchor="ctr"/>
           <a:lstStyle/>
           <a:p>
-            <a:pPr indent="0" marL="0">
+            <a:pPr marL="0" indent="0">
               <a:buNone/>
             </a:pPr>
             <a:r>
@@ -14226,7 +13961,7 @@
             <a:prstDash val="solid"/>
           </a:ln>
           <a:effectLst>
-            <a:outerShdw sx="100000" sy="100000" kx="0" ky="0" algn="bl" rotWithShape="0" blurRad="101600" dist="25400" dir="8100000">
+            <a:outerShdw blurRad="101600" dist="25400" dir="8100000" algn="bl" rotWithShape="0">
               <a:srgbClr val="000000">
                 <a:alpha val="10000"/>
               </a:srgbClr>
@@ -14255,7 +13990,7 @@
           <a:bodyPr wrap="square" rtlCol="0" anchor="ctr"/>
           <a:lstStyle/>
           <a:p>
-            <a:pPr indent="0" marL="0">
+            <a:pPr marL="0" indent="0">
               <a:buNone/>
             </a:pPr>
             <a:r>
@@ -14320,7 +14055,7 @@
           <a:bodyPr wrap="square" lIns="0" tIns="0" rIns="0" bIns="0" rtlCol="0" anchor="ctr"/>
           <a:lstStyle/>
           <a:p>
-            <a:pPr algn="ctr" indent="0" marL="0">
+            <a:pPr marL="0" indent="0" algn="ctr">
               <a:buNone/>
             </a:pPr>
             <a:r>
@@ -14359,7 +14094,7 @@
             <a:prstDash val="solid"/>
           </a:ln>
           <a:effectLst>
-            <a:outerShdw sx="100000" sy="100000" kx="0" ky="0" algn="bl" rotWithShape="0" blurRad="101600" dist="25400" dir="8100000">
+            <a:outerShdw blurRad="101600" dist="25400" dir="8100000" algn="bl" rotWithShape="0">
               <a:srgbClr val="000000">
                 <a:alpha val="10000"/>
               </a:srgbClr>
@@ -14388,7 +14123,7 @@
           <a:bodyPr wrap="square" rtlCol="0" anchor="ctr"/>
           <a:lstStyle/>
           <a:p>
-            <a:pPr indent="0" marL="0">
+            <a:pPr marL="0" indent="0">
               <a:buNone/>
             </a:pPr>
             <a:r>
@@ -14453,7 +14188,7 @@
           <a:bodyPr wrap="square" lIns="0" tIns="0" rIns="0" bIns="0" rtlCol="0" anchor="ctr"/>
           <a:lstStyle/>
           <a:p>
-            <a:pPr algn="ctr" indent="0" marL="0">
+            <a:pPr marL="0" indent="0" algn="ctr">
               <a:buNone/>
             </a:pPr>
             <a:r>
@@ -14492,7 +14227,7 @@
             <a:prstDash val="solid"/>
           </a:ln>
           <a:effectLst>
-            <a:outerShdw sx="100000" sy="100000" kx="0" ky="0" algn="bl" rotWithShape="0" blurRad="101600" dist="25400" dir="8100000">
+            <a:outerShdw blurRad="101600" dist="25400" dir="8100000" algn="bl" rotWithShape="0">
               <a:srgbClr val="000000">
                 <a:alpha val="10000"/>
               </a:srgbClr>
@@ -14521,7 +14256,7 @@
           <a:bodyPr wrap="square" rtlCol="0" anchor="ctr"/>
           <a:lstStyle/>
           <a:p>
-            <a:pPr indent="0" marL="0">
+            <a:pPr marL="0" indent="0">
               <a:buNone/>
             </a:pPr>
             <a:r>
@@ -14586,7 +14321,7 @@
           <a:bodyPr wrap="square" lIns="0" tIns="0" rIns="0" bIns="0" rtlCol="0" anchor="ctr"/>
           <a:lstStyle/>
           <a:p>
-            <a:pPr algn="ctr" indent="0" marL="0">
+            <a:pPr marL="0" indent="0" algn="ctr">
               <a:buNone/>
             </a:pPr>
             <a:r>
@@ -14625,7 +14360,7 @@
             <a:prstDash val="solid"/>
           </a:ln>
           <a:effectLst>
-            <a:outerShdw sx="100000" sy="100000" kx="0" ky="0" algn="bl" rotWithShape="0" blurRad="101600" dist="25400" dir="8100000">
+            <a:outerShdw blurRad="101600" dist="25400" dir="8100000" algn="bl" rotWithShape="0">
               <a:srgbClr val="000000">
                 <a:alpha val="10000"/>
               </a:srgbClr>
@@ -14654,7 +14389,7 @@
           <a:bodyPr wrap="square" rtlCol="0" anchor="ctr"/>
           <a:lstStyle/>
           <a:p>
-            <a:pPr indent="0" marL="0">
+            <a:pPr marL="0" indent="0">
               <a:buNone/>
             </a:pPr>
             <a:r>
@@ -14719,7 +14454,7 @@
           <a:bodyPr wrap="square" lIns="0" tIns="0" rIns="0" bIns="0" rtlCol="0" anchor="ctr"/>
           <a:lstStyle/>
           <a:p>
-            <a:pPr algn="ctr" indent="0" marL="0">
+            <a:pPr marL="0" indent="0" algn="ctr">
               <a:buNone/>
             </a:pPr>
             <a:r>
@@ -14758,7 +14493,7 @@
             <a:prstDash val="solid"/>
           </a:ln>
           <a:effectLst>
-            <a:outerShdw sx="100000" sy="100000" kx="0" ky="0" algn="bl" rotWithShape="0" blurRad="101600" dist="25400" dir="8100000">
+            <a:outerShdw blurRad="101600" dist="25400" dir="8100000" algn="bl" rotWithShape="0">
               <a:srgbClr val="000000">
                 <a:alpha val="10000"/>
               </a:srgbClr>
@@ -14787,7 +14522,7 @@
           <a:bodyPr wrap="square" rtlCol="0" anchor="ctr"/>
           <a:lstStyle/>
           <a:p>
-            <a:pPr indent="0" marL="0">
+            <a:pPr marL="0" indent="0">
               <a:buNone/>
             </a:pPr>
             <a:r>
@@ -14852,7 +14587,7 @@
           <a:bodyPr wrap="square" lIns="0" tIns="0" rIns="0" bIns="0" rtlCol="0" anchor="ctr"/>
           <a:lstStyle/>
           <a:p>
-            <a:pPr algn="ctr" indent="0" marL="0">
+            <a:pPr marL="0" indent="0" algn="ctr">
               <a:buNone/>
             </a:pPr>
             <a:r>
@@ -14888,7 +14623,7 @@
           <a:bodyPr wrap="square" rtlCol="0" anchor="ctr"/>
           <a:lstStyle/>
           <a:p>
-            <a:pPr indent="0" marL="0">
+            <a:pPr marL="0" indent="0">
               <a:buNone/>
             </a:pPr>
             <a:r>
@@ -14927,7 +14662,7 @@
             <a:prstDash val="solid"/>
           </a:ln>
           <a:effectLst>
-            <a:outerShdw sx="100000" sy="100000" kx="0" ky="0" algn="bl" rotWithShape="0" blurRad="101600" dist="25400" dir="8100000">
+            <a:outerShdw blurRad="101600" dist="25400" dir="8100000" algn="bl" rotWithShape="0">
               <a:srgbClr val="000000">
                 <a:alpha val="10000"/>
               </a:srgbClr>
@@ -14981,7 +14716,7 @@
           <a:bodyPr wrap="square" lIns="0" tIns="0" rIns="0" bIns="0" rtlCol="0" anchor="ctr"/>
           <a:lstStyle/>
           <a:p>
-            <a:pPr algn="ctr" indent="0" marL="0">
+            <a:pPr marL="0" indent="0" algn="ctr">
               <a:buNone/>
             </a:pPr>
             <a:r>
@@ -15017,7 +14752,7 @@
           <a:bodyPr wrap="square" rtlCol="0" anchor="ctr"/>
           <a:lstStyle/>
           <a:p>
-            <a:pPr indent="0" marL="0">
+            <a:pPr marL="0" indent="0">
               <a:buNone/>
             </a:pPr>
             <a:r>
@@ -15053,7 +14788,7 @@
           <a:bodyPr wrap="square" rtlCol="0" anchor="ctr"/>
           <a:lstStyle/>
           <a:p>
-            <a:pPr indent="0" marL="0">
+            <a:pPr marL="0" indent="0">
               <a:buNone/>
             </a:pPr>
             <a:r>
@@ -15092,7 +14827,7 @@
             <a:prstDash val="solid"/>
           </a:ln>
           <a:effectLst>
-            <a:outerShdw sx="100000" sy="100000" kx="0" ky="0" algn="bl" rotWithShape="0" blurRad="101600" dist="25400" dir="8100000">
+            <a:outerShdw blurRad="101600" dist="25400" dir="8100000" algn="bl" rotWithShape="0">
               <a:srgbClr val="000000">
                 <a:alpha val="10000"/>
               </a:srgbClr>
@@ -15146,7 +14881,7 @@
           <a:bodyPr wrap="square" lIns="0" tIns="0" rIns="0" bIns="0" rtlCol="0" anchor="ctr"/>
           <a:lstStyle/>
           <a:p>
-            <a:pPr algn="ctr" indent="0" marL="0">
+            <a:pPr marL="0" indent="0" algn="ctr">
               <a:buNone/>
             </a:pPr>
             <a:r>
@@ -15182,7 +14917,7 @@
           <a:bodyPr wrap="square" rtlCol="0" anchor="ctr"/>
           <a:lstStyle/>
           <a:p>
-            <a:pPr indent="0" marL="0">
+            <a:pPr marL="0" indent="0">
               <a:buNone/>
             </a:pPr>
             <a:r>
@@ -15218,7 +14953,7 @@
           <a:bodyPr wrap="square" rtlCol="0" anchor="ctr"/>
           <a:lstStyle/>
           <a:p>
-            <a:pPr indent="0" marL="0">
+            <a:pPr marL="0" indent="0">
               <a:buNone/>
             </a:pPr>
             <a:r>
@@ -15257,7 +14992,7 @@
             <a:prstDash val="solid"/>
           </a:ln>
           <a:effectLst>
-            <a:outerShdw sx="100000" sy="100000" kx="0" ky="0" algn="bl" rotWithShape="0" blurRad="101600" dist="25400" dir="8100000">
+            <a:outerShdw blurRad="101600" dist="25400" dir="8100000" algn="bl" rotWithShape="0">
               <a:srgbClr val="000000">
                 <a:alpha val="10000"/>
               </a:srgbClr>
@@ -15311,7 +15046,7 @@
           <a:bodyPr wrap="square" lIns="0" tIns="0" rIns="0" bIns="0" rtlCol="0" anchor="ctr"/>
           <a:lstStyle/>
           <a:p>
-            <a:pPr algn="ctr" indent="0" marL="0">
+            <a:pPr marL="0" indent="0" algn="ctr">
               <a:buNone/>
             </a:pPr>
             <a:r>
@@ -15347,7 +15082,7 @@
           <a:bodyPr wrap="square" rtlCol="0" anchor="ctr"/>
           <a:lstStyle/>
           <a:p>
-            <a:pPr indent="0" marL="0">
+            <a:pPr marL="0" indent="0">
               <a:buNone/>
             </a:pPr>
             <a:r>
@@ -15383,7 +15118,7 @@
           <a:bodyPr wrap="square" rtlCol="0" anchor="ctr"/>
           <a:lstStyle/>
           <a:p>
-            <a:pPr indent="0" marL="0">
+            <a:pPr marL="0" indent="0">
               <a:buNone/>
             </a:pPr>
             <a:r>
@@ -15422,7 +15157,7 @@
             <a:prstDash val="solid"/>
           </a:ln>
           <a:effectLst>
-            <a:outerShdw sx="100000" sy="100000" kx="0" ky="0" algn="bl" rotWithShape="0" blurRad="101600" dist="25400" dir="8100000">
+            <a:outerShdw blurRad="101600" dist="25400" dir="8100000" algn="bl" rotWithShape="0">
               <a:srgbClr val="000000">
                 <a:alpha val="10000"/>
               </a:srgbClr>
@@ -15476,7 +15211,7 @@
           <a:bodyPr wrap="square" lIns="0" tIns="0" rIns="0" bIns="0" rtlCol="0" anchor="ctr"/>
           <a:lstStyle/>
           <a:p>
-            <a:pPr algn="ctr" indent="0" marL="0">
+            <a:pPr marL="0" indent="0" algn="ctr">
               <a:buNone/>
             </a:pPr>
             <a:r>
@@ -15512,7 +15247,7 @@
           <a:bodyPr wrap="square" rtlCol="0" anchor="ctr"/>
           <a:lstStyle/>
           <a:p>
-            <a:pPr indent="0" marL="0">
+            <a:pPr marL="0" indent="0">
               <a:buNone/>
             </a:pPr>
             <a:r>
@@ -15548,7 +15283,7 @@
           <a:bodyPr wrap="square" rtlCol="0" anchor="ctr"/>
           <a:lstStyle/>
           <a:p>
-            <a:pPr indent="0" marL="0">
+            <a:pPr marL="0" indent="0">
               <a:buNone/>
             </a:pPr>
             <a:r>
@@ -15587,7 +15322,7 @@
             <a:prstDash val="solid"/>
           </a:ln>
           <a:effectLst>
-            <a:outerShdw sx="100000" sy="100000" kx="0" ky="0" algn="bl" rotWithShape="0" blurRad="101600" dist="25400" dir="8100000">
+            <a:outerShdw blurRad="101600" dist="25400" dir="8100000" algn="bl" rotWithShape="0">
               <a:srgbClr val="000000">
                 <a:alpha val="10000"/>
               </a:srgbClr>
@@ -15641,7 +15376,7 @@
           <a:bodyPr wrap="square" lIns="0" tIns="0" rIns="0" bIns="0" rtlCol="0" anchor="ctr"/>
           <a:lstStyle/>
           <a:p>
-            <a:pPr algn="ctr" indent="0" marL="0">
+            <a:pPr marL="0" indent="0" algn="ctr">
               <a:buNone/>
             </a:pPr>
             <a:r>
@@ -15677,7 +15412,7 @@
           <a:bodyPr wrap="square" rtlCol="0" anchor="ctr"/>
           <a:lstStyle/>
           <a:p>
-            <a:pPr indent="0" marL="0">
+            <a:pPr marL="0" indent="0">
               <a:buNone/>
             </a:pPr>
             <a:r>
@@ -15713,7 +15448,7 @@
           <a:bodyPr wrap="square" rtlCol="0" anchor="ctr"/>
           <a:lstStyle/>
           <a:p>
-            <a:pPr indent="0" marL="0">
+            <a:pPr marL="0" indent="0">
               <a:buNone/>
             </a:pPr>
             <a:r>
@@ -16029,4 +15764,299 @@
     </a:ext>
   </a:extLst>
 </a:theme>
+</file>
+
+<file path=ppt/theme/theme2.xml><?xml version="1.0" encoding="utf-8"?>
+<a:theme xmlns:a="http://schemas.openxmlformats.org/drawingml/2006/main" name="Thème Office">
+  <a:themeElements>
+    <a:clrScheme name="Office">
+      <a:dk1>
+        <a:sysClr val="windowText" lastClr="000000"/>
+      </a:dk1>
+      <a:lt1>
+        <a:sysClr val="window" lastClr="FFFFFF"/>
+      </a:lt1>
+      <a:dk2>
+        <a:srgbClr val="44546A"/>
+      </a:dk2>
+      <a:lt2>
+        <a:srgbClr val="E7E6E6"/>
+      </a:lt2>
+      <a:accent1>
+        <a:srgbClr val="4472C4"/>
+      </a:accent1>
+      <a:accent2>
+        <a:srgbClr val="ED7D31"/>
+      </a:accent2>
+      <a:accent3>
+        <a:srgbClr val="A5A5A5"/>
+      </a:accent3>
+      <a:accent4>
+        <a:srgbClr val="FFC000"/>
+      </a:accent4>
+      <a:accent5>
+        <a:srgbClr val="5B9BD5"/>
+      </a:accent5>
+      <a:accent6>
+        <a:srgbClr val="70AD47"/>
+      </a:accent6>
+      <a:hlink>
+        <a:srgbClr val="0563C1"/>
+      </a:hlink>
+      <a:folHlink>
+        <a:srgbClr val="954F72"/>
+      </a:folHlink>
+    </a:clrScheme>
+    <a:fontScheme name="Office">
+      <a:majorFont>
+        <a:latin typeface="Calibri Light" panose="020F0302020204030204"/>
+        <a:ea typeface=""/>
+        <a:cs typeface=""/>
+        <a:font script="Jpan" typeface="游ゴシック Light"/>
+        <a:font script="Hang" typeface="맑은 고딕"/>
+        <a:font script="Hans" typeface="等线 Light"/>
+        <a:font script="Hant" typeface="新細明體"/>
+        <a:font script="Arab" typeface="Times New Roman"/>
+        <a:font script="Hebr" typeface="Times New Roman"/>
+        <a:font script="Thai" typeface="Angsana New"/>
+        <a:font script="Ethi" typeface="Nyala"/>
+        <a:font script="Beng" typeface="Vrinda"/>
+        <a:font script="Gujr" typeface="Shruti"/>
+        <a:font script="Khmr" typeface="MoolBoran"/>
+        <a:font script="Knda" typeface="Tunga"/>
+        <a:font script="Guru" typeface="Raavi"/>
+        <a:font script="Cans" typeface="Euphemia"/>
+        <a:font script="Cher" typeface="Plantagenet Cherokee"/>
+        <a:font script="Yiii" typeface="Microsoft Yi Baiti"/>
+        <a:font script="Tibt" typeface="Microsoft Himalaya"/>
+        <a:font script="Thaa" typeface="MV Boli"/>
+        <a:font script="Deva" typeface="Mangal"/>
+        <a:font script="Telu" typeface="Gautami"/>
+        <a:font script="Taml" typeface="Latha"/>
+        <a:font script="Syrc" typeface="Estrangelo Edessa"/>
+        <a:font script="Orya" typeface="Kalinga"/>
+        <a:font script="Mlym" typeface="Kartika"/>
+        <a:font script="Laoo" typeface="DokChampa"/>
+        <a:font script="Sinh" typeface="Iskoola Pota"/>
+        <a:font script="Mong" typeface="Mongolian Baiti"/>
+        <a:font script="Viet" typeface="Times New Roman"/>
+        <a:font script="Uigh" typeface="Microsoft Uighur"/>
+        <a:font script="Geor" typeface="Sylfaen"/>
+        <a:font script="Armn" typeface="Arial"/>
+        <a:font script="Bugi" typeface="Leelawadee UI"/>
+        <a:font script="Bopo" typeface="Microsoft JhengHei"/>
+        <a:font script="Java" typeface="Javanese Text"/>
+        <a:font script="Lisu" typeface="Segoe UI"/>
+        <a:font script="Mymr" typeface="Myanmar Text"/>
+        <a:font script="Nkoo" typeface="Ebrima"/>
+        <a:font script="Olck" typeface="Nirmala UI"/>
+        <a:font script="Osma" typeface="Ebrima"/>
+        <a:font script="Phag" typeface="Phagspa"/>
+        <a:font script="Syrn" typeface="Estrangelo Edessa"/>
+        <a:font script="Syrj" typeface="Estrangelo Edessa"/>
+        <a:font script="Syre" typeface="Estrangelo Edessa"/>
+        <a:font script="Sora" typeface="Nirmala UI"/>
+        <a:font script="Tale" typeface="Microsoft Tai Le"/>
+        <a:font script="Talu" typeface="Microsoft New Tai Lue"/>
+        <a:font script="Tfng" typeface="Ebrima"/>
+      </a:majorFont>
+      <a:minorFont>
+        <a:latin typeface="Calibri" panose="020F0502020204030204"/>
+        <a:ea typeface=""/>
+        <a:cs typeface=""/>
+        <a:font script="Jpan" typeface="游ゴシック"/>
+        <a:font script="Hang" typeface="맑은 고딕"/>
+        <a:font script="Hans" typeface="等线"/>
+        <a:font script="Hant" typeface="新細明體"/>
+        <a:font script="Arab" typeface="Arial"/>
+        <a:font script="Hebr" typeface="Arial"/>
+        <a:font script="Thai" typeface="Cordia New"/>
+        <a:font script="Ethi" typeface="Nyala"/>
+        <a:font script="Beng" typeface="Vrinda"/>
+        <a:font script="Gujr" typeface="Shruti"/>
+        <a:font script="Khmr" typeface="DaunPenh"/>
+        <a:font script="Knda" typeface="Tunga"/>
+        <a:font script="Guru" typeface="Raavi"/>
+        <a:font script="Cans" typeface="Euphemia"/>
+        <a:font script="Cher" typeface="Plantagenet Cherokee"/>
+        <a:font script="Yiii" typeface="Microsoft Yi Baiti"/>
+        <a:font script="Tibt" typeface="Microsoft Himalaya"/>
+        <a:font script="Thaa" typeface="MV Boli"/>
+        <a:font script="Deva" typeface="Mangal"/>
+        <a:font script="Telu" typeface="Gautami"/>
+        <a:font script="Taml" typeface="Latha"/>
+        <a:font script="Syrc" typeface="Estrangelo Edessa"/>
+        <a:font script="Orya" typeface="Kalinga"/>
+        <a:font script="Mlym" typeface="Kartika"/>
+        <a:font script="Laoo" typeface="DokChampa"/>
+        <a:font script="Sinh" typeface="Iskoola Pota"/>
+        <a:font script="Mong" typeface="Mongolian Baiti"/>
+        <a:font script="Viet" typeface="Arial"/>
+        <a:font script="Uigh" typeface="Microsoft Uighur"/>
+        <a:font script="Geor" typeface="Sylfaen"/>
+        <a:font script="Armn" typeface="Arial"/>
+        <a:font script="Bugi" typeface="Leelawadee UI"/>
+        <a:font script="Bopo" typeface="Microsoft JhengHei"/>
+        <a:font script="Java" typeface="Javanese Text"/>
+        <a:font script="Lisu" typeface="Segoe UI"/>
+        <a:font script="Mymr" typeface="Myanmar Text"/>
+        <a:font script="Nkoo" typeface="Ebrima"/>
+        <a:font script="Olck" typeface="Nirmala UI"/>
+        <a:font script="Osma" typeface="Ebrima"/>
+        <a:font script="Phag" typeface="Phagspa"/>
+        <a:font script="Syrn" typeface="Estrangelo Edessa"/>
+        <a:font script="Syrj" typeface="Estrangelo Edessa"/>
+        <a:font script="Syre" typeface="Estrangelo Edessa"/>
+        <a:font script="Sora" typeface="Nirmala UI"/>
+        <a:font script="Tale" typeface="Microsoft Tai Le"/>
+        <a:font script="Talu" typeface="Microsoft New Tai Lue"/>
+        <a:font script="Tfng" typeface="Ebrima"/>
+      </a:minorFont>
+    </a:fontScheme>
+    <a:fmtScheme name="Office">
+      <a:fillStyleLst>
+        <a:solidFill>
+          <a:schemeClr val="phClr"/>
+        </a:solidFill>
+        <a:gradFill rotWithShape="1">
+          <a:gsLst>
+            <a:gs pos="0">
+              <a:schemeClr val="phClr">
+                <a:lumMod val="110000"/>
+                <a:satMod val="105000"/>
+                <a:tint val="67000"/>
+              </a:schemeClr>
+            </a:gs>
+            <a:gs pos="50000">
+              <a:schemeClr val="phClr">
+                <a:lumMod val="105000"/>
+                <a:satMod val="103000"/>
+                <a:tint val="73000"/>
+              </a:schemeClr>
+            </a:gs>
+            <a:gs pos="100000">
+              <a:schemeClr val="phClr">
+                <a:lumMod val="105000"/>
+                <a:satMod val="109000"/>
+                <a:tint val="81000"/>
+              </a:schemeClr>
+            </a:gs>
+          </a:gsLst>
+          <a:lin ang="5400000" scaled="0"/>
+        </a:gradFill>
+        <a:gradFill rotWithShape="1">
+          <a:gsLst>
+            <a:gs pos="0">
+              <a:schemeClr val="phClr">
+                <a:satMod val="103000"/>
+                <a:lumMod val="102000"/>
+                <a:tint val="94000"/>
+              </a:schemeClr>
+            </a:gs>
+            <a:gs pos="50000">
+              <a:schemeClr val="phClr">
+                <a:satMod val="110000"/>
+                <a:lumMod val="100000"/>
+                <a:shade val="100000"/>
+              </a:schemeClr>
+            </a:gs>
+            <a:gs pos="100000">
+              <a:schemeClr val="phClr">
+                <a:lumMod val="99000"/>
+                <a:satMod val="120000"/>
+                <a:shade val="78000"/>
+              </a:schemeClr>
+            </a:gs>
+          </a:gsLst>
+          <a:lin ang="5400000" scaled="0"/>
+        </a:gradFill>
+      </a:fillStyleLst>
+      <a:lnStyleLst>
+        <a:ln w="6350" cap="flat" cmpd="sng" algn="ctr">
+          <a:solidFill>
+            <a:schemeClr val="phClr"/>
+          </a:solidFill>
+          <a:prstDash val="solid"/>
+          <a:miter lim="800000"/>
+        </a:ln>
+        <a:ln w="12700" cap="flat" cmpd="sng" algn="ctr">
+          <a:solidFill>
+            <a:schemeClr val="phClr"/>
+          </a:solidFill>
+          <a:prstDash val="solid"/>
+          <a:miter lim="800000"/>
+        </a:ln>
+        <a:ln w="19050" cap="flat" cmpd="sng" algn="ctr">
+          <a:solidFill>
+            <a:schemeClr val="phClr"/>
+          </a:solidFill>
+          <a:prstDash val="solid"/>
+          <a:miter lim="800000"/>
+        </a:ln>
+      </a:lnStyleLst>
+      <a:effectStyleLst>
+        <a:effectStyle>
+          <a:effectLst/>
+        </a:effectStyle>
+        <a:effectStyle>
+          <a:effectLst/>
+        </a:effectStyle>
+        <a:effectStyle>
+          <a:effectLst>
+            <a:outerShdw blurRad="57150" dist="19050" dir="5400000" algn="ctr" rotWithShape="0">
+              <a:srgbClr val="000000">
+                <a:alpha val="63000"/>
+              </a:srgbClr>
+            </a:outerShdw>
+          </a:effectLst>
+        </a:effectStyle>
+      </a:effectStyleLst>
+      <a:bgFillStyleLst>
+        <a:solidFill>
+          <a:schemeClr val="phClr"/>
+        </a:solidFill>
+        <a:solidFill>
+          <a:schemeClr val="phClr">
+            <a:tint val="95000"/>
+            <a:satMod val="170000"/>
+          </a:schemeClr>
+        </a:solidFill>
+        <a:gradFill rotWithShape="1">
+          <a:gsLst>
+            <a:gs pos="0">
+              <a:schemeClr val="phClr">
+                <a:tint val="93000"/>
+                <a:satMod val="150000"/>
+                <a:shade val="98000"/>
+                <a:lumMod val="102000"/>
+              </a:schemeClr>
+            </a:gs>
+            <a:gs pos="50000">
+              <a:schemeClr val="phClr">
+                <a:tint val="98000"/>
+                <a:satMod val="130000"/>
+                <a:shade val="90000"/>
+                <a:lumMod val="103000"/>
+              </a:schemeClr>
+            </a:gs>
+            <a:gs pos="100000">
+              <a:schemeClr val="phClr">
+                <a:shade val="63000"/>
+                <a:satMod val="120000"/>
+              </a:schemeClr>
+            </a:gs>
+          </a:gsLst>
+          <a:lin ang="5400000" scaled="0"/>
+        </a:gradFill>
+      </a:bgFillStyleLst>
+    </a:fmtScheme>
+  </a:themeElements>
+  <a:objectDefaults/>
+  <a:extraClrSchemeLst/>
+  <a:extLst>
+    <a:ext uri="{05A4C25C-085E-4340-85A3-A5531E510DB2}">
+      <thm15:themeFamily xmlns:thm15="http://schemas.microsoft.com/office/thememl/2012/main" name="Office Theme" id="{62F939B6-93AF-4DB8-9C6B-D6C7DFDC589F}" vid="{4A3C46E8-61CC-4603-A589-7422A47A8E4A}"/>
+    </a:ext>
+  </a:extLst>
+</a:theme>
 </file>
--- a/PFE/PFE_Cosmetique_Presentation.pptx
+++ b/PFE/PFE_Cosmetique_Presentation.pptx
@@ -6684,7 +6684,7 @@
         <p:spPr>
           <a:xfrm>
             <a:off x="1051560" y="1033272"/>
-            <a:ext cx="3200400" cy="274320"/>
+            <a:ext cx="2495204" cy="274320"/>
           </a:xfrm>
           <a:prstGeom prst="rect">
             <a:avLst/>
@@ -6941,7 +6941,7 @@
         <p:spPr>
           <a:xfrm>
             <a:off x="5513832" y="1033272"/>
-            <a:ext cx="3200400" cy="274320"/>
+            <a:ext cx="2578608" cy="274320"/>
           </a:xfrm>
           <a:prstGeom prst="rect">
             <a:avLst/>
@@ -7198,7 +7198,7 @@
         <p:spPr>
           <a:xfrm>
             <a:off x="1051560" y="3044952"/>
-            <a:ext cx="3200400" cy="274320"/>
+            <a:ext cx="2252749" cy="274320"/>
           </a:xfrm>
           <a:prstGeom prst="rect">
             <a:avLst/>
@@ -7455,7 +7455,7 @@
         <p:spPr>
           <a:xfrm>
             <a:off x="5513832" y="3044952"/>
-            <a:ext cx="3200400" cy="274320"/>
+            <a:ext cx="2099241" cy="274320"/>
           </a:xfrm>
           <a:prstGeom prst="rect">
             <a:avLst/>
